--- a/HPML_Final_Project_Presentation_as7629.pptx
+++ b/HPML_Final_Project_Presentation_as7629.pptx
@@ -5,31 +5,30 @@
     <p:sldMasterId id="2147483648" r:id="rId1"/>
   </p:sldMasterIdLst>
   <p:notesMasterIdLst>
-    <p:notesMasterId r:id="rId24"/>
+    <p:notesMasterId r:id="rId23"/>
   </p:notesMasterIdLst>
   <p:sldIdLst>
     <p:sldId id="256" r:id="rId2"/>
     <p:sldId id="257" r:id="rId3"/>
-    <p:sldId id="258" r:id="rId4"/>
-    <p:sldId id="259" r:id="rId5"/>
-    <p:sldId id="260" r:id="rId6"/>
-    <p:sldId id="261" r:id="rId7"/>
-    <p:sldId id="271" r:id="rId8"/>
-    <p:sldId id="263" r:id="rId9"/>
-    <p:sldId id="264" r:id="rId10"/>
-    <p:sldId id="265" r:id="rId11"/>
-    <p:sldId id="266" r:id="rId12"/>
-    <p:sldId id="267" r:id="rId13"/>
-    <p:sldId id="268" r:id="rId14"/>
-    <p:sldId id="269" r:id="rId15"/>
-    <p:sldId id="272" r:id="rId16"/>
-    <p:sldId id="273" r:id="rId17"/>
-    <p:sldId id="275" r:id="rId18"/>
-    <p:sldId id="277" r:id="rId19"/>
-    <p:sldId id="278" r:id="rId20"/>
-    <p:sldId id="279" r:id="rId21"/>
-    <p:sldId id="280" r:id="rId22"/>
-    <p:sldId id="281" r:id="rId23"/>
+    <p:sldId id="284" r:id="rId4"/>
+    <p:sldId id="258" r:id="rId5"/>
+    <p:sldId id="259" r:id="rId6"/>
+    <p:sldId id="260" r:id="rId7"/>
+    <p:sldId id="261" r:id="rId8"/>
+    <p:sldId id="271" r:id="rId9"/>
+    <p:sldId id="263" r:id="rId10"/>
+    <p:sldId id="264" r:id="rId11"/>
+    <p:sldId id="265" r:id="rId12"/>
+    <p:sldId id="266" r:id="rId13"/>
+    <p:sldId id="267" r:id="rId14"/>
+    <p:sldId id="268" r:id="rId15"/>
+    <p:sldId id="269" r:id="rId16"/>
+    <p:sldId id="272" r:id="rId17"/>
+    <p:sldId id="273" r:id="rId18"/>
+    <p:sldId id="275" r:id="rId19"/>
+    <p:sldId id="277" r:id="rId20"/>
+    <p:sldId id="278" r:id="rId21"/>
+    <p:sldId id="279" r:id="rId22"/>
   </p:sldIdLst>
   <p:sldSz cx="12192000" cy="6858000"/>
   <p:notesSz cx="6858000" cy="12192000"/>
@@ -407,7 +406,7 @@
           <a:p>
             <a:fld id="{F7021451-1387-4CA6-816F-3879F97B5CBC}" type="slidenum">
               <a:rPr lang="en-US"/>
-              <a:t>10</a:t>
+              <a:t>11</a:t>
             </a:fld>
             <a:endParaRPr lang="en-US"/>
           </a:p>
@@ -491,7 +490,7 @@
           <a:p>
             <a:fld id="{F7021451-1387-4CA6-816F-3879F97B5CBC}" type="slidenum">
               <a:rPr lang="en-US"/>
-              <a:t>11</a:t>
+              <a:t>12</a:t>
             </a:fld>
             <a:endParaRPr lang="en-US"/>
           </a:p>
@@ -575,7 +574,7 @@
           <a:p>
             <a:fld id="{F7021451-1387-4CA6-816F-3879F97B5CBC}" type="slidenum">
               <a:rPr lang="en-US"/>
-              <a:t>12</a:t>
+              <a:t>13</a:t>
             </a:fld>
             <a:endParaRPr lang="en-US"/>
           </a:p>
@@ -659,7 +658,7 @@
           <a:p>
             <a:fld id="{F7021451-1387-4CA6-816F-3879F97B5CBC}" type="slidenum">
               <a:rPr lang="en-US"/>
-              <a:t>13</a:t>
+              <a:t>14</a:t>
             </a:fld>
             <a:endParaRPr lang="en-US"/>
           </a:p>
@@ -743,7 +742,7 @@
           <a:p>
             <a:fld id="{F7021451-1387-4CA6-816F-3879F97B5CBC}" type="slidenum">
               <a:rPr lang="en-US"/>
-              <a:t>14</a:t>
+              <a:t>15</a:t>
             </a:fld>
             <a:endParaRPr lang="en-US"/>
           </a:p>
@@ -851,7 +850,7 @@
           <a:p>
             <a:fld id="{F7021451-1387-4CA6-816F-3879F97B5CBC}" type="slidenum">
               <a:rPr lang="en-US"/>
-              <a:t>15</a:t>
+              <a:t>16</a:t>
             </a:fld>
             <a:endParaRPr lang="en-US"/>
           </a:p>
@@ -959,7 +958,7 @@
           <a:p>
             <a:fld id="{F7021451-1387-4CA6-816F-3879F97B5CBC}" type="slidenum">
               <a:rPr lang="en-US"/>
-              <a:t>16</a:t>
+              <a:t>17</a:t>
             </a:fld>
             <a:endParaRPr lang="en-US"/>
           </a:p>
@@ -1067,7 +1066,7 @@
           <a:p>
             <a:fld id="{F7021451-1387-4CA6-816F-3879F97B5CBC}" type="slidenum">
               <a:rPr lang="en-US"/>
-              <a:t>17</a:t>
+              <a:t>18</a:t>
             </a:fld>
             <a:endParaRPr lang="en-US"/>
           </a:p>
@@ -1175,7 +1174,7 @@
           <a:p>
             <a:fld id="{F7021451-1387-4CA6-816F-3879F97B5CBC}" type="slidenum">
               <a:rPr lang="en-US"/>
-              <a:t>18</a:t>
+              <a:t>19</a:t>
             </a:fld>
             <a:endParaRPr lang="en-US"/>
           </a:p>
@@ -1283,7 +1282,7 @@
           <a:p>
             <a:fld id="{F7021451-1387-4CA6-816F-3879F97B5CBC}" type="slidenum">
               <a:rPr lang="en-US"/>
-              <a:t>19</a:t>
+              <a:t>20</a:t>
             </a:fld>
             <a:endParaRPr lang="en-US"/>
           </a:p>
@@ -1475,7 +1474,7 @@
           <a:p>
             <a:fld id="{F7021451-1387-4CA6-816F-3879F97B5CBC}" type="slidenum">
               <a:rPr lang="en-US"/>
-              <a:t>20</a:t>
+              <a:t>21</a:t>
             </a:fld>
             <a:endParaRPr lang="en-US"/>
           </a:p>
@@ -1485,114 +1484,6 @@
     <p:extLst>
       <p:ext uri="{BB962C8B-B14F-4D97-AF65-F5344CB8AC3E}">
         <p14:creationId xmlns:p14="http://schemas.microsoft.com/office/powerpoint/2010/main" val="2737175867"/>
-      </p:ext>
-    </p:extLst>
-  </p:cSld>
-  <p:clrMapOvr>
-    <a:masterClrMapping/>
-  </p:clrMapOvr>
-</p:notes>
-</file>
-
-<file path=ppt/notesSlides/notesSlide21.xml><?xml version="1.0" encoding="utf-8"?>
-<p:notes xmlns:a="http://schemas.openxmlformats.org/drawingml/2006/main" xmlns:r="http://schemas.openxmlformats.org/officeDocument/2006/relationships" xmlns:p="http://schemas.openxmlformats.org/presentationml/2006/main">
-  <p:cSld>
-    <p:spTree>
-      <p:nvGrpSpPr>
-        <p:cNvPr id="1" name="">
-          <a:extLst>
-            <a:ext uri="{FF2B5EF4-FFF2-40B4-BE49-F238E27FC236}">
-              <a16:creationId xmlns:a16="http://schemas.microsoft.com/office/drawing/2014/main" id="{38C731DD-02A6-94C1-9AD8-940080222AB6}"/>
-            </a:ext>
-          </a:extLst>
-        </p:cNvPr>
-        <p:cNvGrpSpPr/>
-        <p:nvPr/>
-      </p:nvGrpSpPr>
-      <p:grpSpPr>
-        <a:xfrm>
-          <a:off x="0" y="0"/>
-          <a:ext cx="0" cy="0"/>
-          <a:chOff x="0" y="0"/>
-          <a:chExt cx="0" cy="0"/>
-        </a:xfrm>
-      </p:grpSpPr>
-      <p:sp>
-        <p:nvSpPr>
-          <p:cNvPr id="2" name="Slide Image Placeholder 1">
-            <a:extLst>
-              <a:ext uri="{FF2B5EF4-FFF2-40B4-BE49-F238E27FC236}">
-                <a16:creationId xmlns:a16="http://schemas.microsoft.com/office/drawing/2014/main" id="{5C93E292-1067-2364-C901-8D17C122FFCD}"/>
-              </a:ext>
-            </a:extLst>
-          </p:cNvPr>
-          <p:cNvSpPr>
-            <a:spLocks noGrp="1" noRot="1" noChangeAspect="1"/>
-          </p:cNvSpPr>
-          <p:nvPr>
-            <p:ph type="sldImg"/>
-          </p:nvPr>
-        </p:nvSpPr>
-        <p:spPr/>
-      </p:sp>
-      <p:sp>
-        <p:nvSpPr>
-          <p:cNvPr id="3" name="Notes Placeholder 2">
-            <a:extLst>
-              <a:ext uri="{FF2B5EF4-FFF2-40B4-BE49-F238E27FC236}">
-                <a16:creationId xmlns:a16="http://schemas.microsoft.com/office/drawing/2014/main" id="{F8F5869F-FDB0-DE91-EBAD-17B7E2473277}"/>
-              </a:ext>
-            </a:extLst>
-          </p:cNvPr>
-          <p:cNvSpPr>
-            <a:spLocks noGrp="1"/>
-          </p:cNvSpPr>
-          <p:nvPr>
-            <p:ph type="body" idx="1"/>
-          </p:nvPr>
-        </p:nvSpPr>
-        <p:spPr/>
-        <p:txBody>
-          <a:bodyPr/>
-          <a:lstStyle/>
-          <a:p>
-            <a:endParaRPr lang="en-US" dirty="0"/>
-          </a:p>
-        </p:txBody>
-      </p:sp>
-      <p:sp>
-        <p:nvSpPr>
-          <p:cNvPr id="4" name="Slide Number Placeholder 3">
-            <a:extLst>
-              <a:ext uri="{FF2B5EF4-FFF2-40B4-BE49-F238E27FC236}">
-                <a16:creationId xmlns:a16="http://schemas.microsoft.com/office/drawing/2014/main" id="{30EAB70C-7DF5-F8BE-50D8-82FD922E6AF6}"/>
-              </a:ext>
-            </a:extLst>
-          </p:cNvPr>
-          <p:cNvSpPr>
-            <a:spLocks noGrp="1"/>
-          </p:cNvSpPr>
-          <p:nvPr>
-            <p:ph type="sldNum" sz="quarter" idx="10"/>
-          </p:nvPr>
-        </p:nvSpPr>
-        <p:spPr/>
-        <p:txBody>
-          <a:bodyPr/>
-          <a:lstStyle/>
-          <a:p>
-            <a:fld id="{F7021451-1387-4CA6-816F-3879F97B5CBC}" type="slidenum">
-              <a:rPr lang="en-US"/>
-              <a:t>21</a:t>
-            </a:fld>
-            <a:endParaRPr lang="en-US"/>
-          </a:p>
-        </p:txBody>
-      </p:sp>
-    </p:spTree>
-    <p:extLst>
-      <p:ext uri="{BB962C8B-B14F-4D97-AF65-F5344CB8AC3E}">
-        <p14:creationId xmlns:p14="http://schemas.microsoft.com/office/powerpoint/2010/main" val="3779373914"/>
       </p:ext>
     </p:extLst>
   </p:cSld>
@@ -1667,7 +1558,7 @@
           <a:p>
             <a:fld id="{F7021451-1387-4CA6-816F-3879F97B5CBC}" type="slidenum">
               <a:rPr lang="en-US"/>
-              <a:t>3</a:t>
+              <a:t>4</a:t>
             </a:fld>
             <a:endParaRPr lang="en-US"/>
           </a:p>
@@ -1751,7 +1642,7 @@
           <a:p>
             <a:fld id="{F7021451-1387-4CA6-816F-3879F97B5CBC}" type="slidenum">
               <a:rPr lang="en-US"/>
-              <a:t>4</a:t>
+              <a:t>5</a:t>
             </a:fld>
             <a:endParaRPr lang="en-US"/>
           </a:p>
@@ -1835,7 +1726,7 @@
           <a:p>
             <a:fld id="{F7021451-1387-4CA6-816F-3879F97B5CBC}" type="slidenum">
               <a:rPr lang="en-US"/>
-              <a:t>5</a:t>
+              <a:t>6</a:t>
             </a:fld>
             <a:endParaRPr lang="en-US"/>
           </a:p>
@@ -1919,7 +1810,7 @@
           <a:p>
             <a:fld id="{F7021451-1387-4CA6-816F-3879F97B5CBC}" type="slidenum">
               <a:rPr lang="en-US"/>
-              <a:t>6</a:t>
+              <a:t>7</a:t>
             </a:fld>
             <a:endParaRPr lang="en-US"/>
           </a:p>
@@ -2027,7 +1918,7 @@
           <a:p>
             <a:fld id="{F7021451-1387-4CA6-816F-3879F97B5CBC}" type="slidenum">
               <a:rPr lang="en-US"/>
-              <a:t>7</a:t>
+              <a:t>8</a:t>
             </a:fld>
             <a:endParaRPr lang="en-US"/>
           </a:p>
@@ -2111,7 +2002,7 @@
           <a:p>
             <a:fld id="{F7021451-1387-4CA6-816F-3879F97B5CBC}" type="slidenum">
               <a:rPr lang="en-US"/>
-              <a:t>8</a:t>
+              <a:t>9</a:t>
             </a:fld>
             <a:endParaRPr lang="en-US"/>
           </a:p>
@@ -2195,7 +2086,7 @@
           <a:p>
             <a:fld id="{F7021451-1387-4CA6-816F-3879F97B5CBC}" type="slidenum">
               <a:rPr lang="en-US"/>
-              <a:t>9</a:t>
+              <a:t>10</a:t>
             </a:fld>
             <a:endParaRPr lang="en-US"/>
           </a:p>
@@ -2620,7 +2511,18 @@
                 <a:ea typeface="Calibri" pitchFamily="34" charset="-122"/>
                 <a:cs typeface="Calibri" pitchFamily="34" charset="-120"/>
               </a:rPr>
-              <a:t>Profiling-Driven Optimization of a Multimodal SLM for Efficient Image Captioning</a:t>
+              <a:t>Nano-</a:t>
+            </a:r>
+            <a:r>
+              <a:rPr lang="en-US" sz="5400" b="1" dirty="0" err="1">
+                <a:solidFill>
+                  <a:srgbClr val="FFFFFF"/>
+                </a:solidFill>
+                <a:latin typeface="Calibri" pitchFamily="34" charset="0"/>
+                <a:ea typeface="Calibri" pitchFamily="34" charset="-122"/>
+                <a:cs typeface="Calibri" pitchFamily="34" charset="-120"/>
+              </a:rPr>
+              <a:t>LLaVa</a:t>
             </a:r>
             <a:endParaRPr lang="en-US" sz="5400" dirty="0"/>
           </a:p>
@@ -2779,7 +2681,7 @@
               <a:rPr lang="en-US" sz="1400" dirty="0">
                 <a:hlinkClick r:id="rId3"/>
               </a:rPr>
-              <a:t>https://github.com/AlexanderSwartz/multimodal-nanochat</a:t>
+              <a:t>https://github.com/AlexanderSwartz/nano-llava</a:t>
             </a:r>
             <a:endParaRPr lang="en-US" sz="1400" dirty="0"/>
           </a:p>
@@ -2859,6 +2761,255 @@
 </file>
 
 <file path=ppt/slides/slide10.xml><?xml version="1.0" encoding="utf-8"?>
+<p:sld xmlns:a="http://schemas.openxmlformats.org/drawingml/2006/main" xmlns:r="http://schemas.openxmlformats.org/officeDocument/2006/relationships" xmlns:p="http://schemas.openxmlformats.org/presentationml/2006/main">
+  <p:cSld name="Slide 9">
+    <p:bg>
+      <p:bgPr>
+        <a:solidFill>
+          <a:srgbClr val="FFFFFF"/>
+        </a:solidFill>
+        <a:effectLst/>
+      </p:bgPr>
+    </p:bg>
+    <p:spTree>
+      <p:nvGrpSpPr>
+        <p:cNvPr id="1" name=""/>
+        <p:cNvGrpSpPr/>
+        <p:nvPr/>
+      </p:nvGrpSpPr>
+      <p:grpSpPr>
+        <a:xfrm>
+          <a:off x="0" y="0"/>
+          <a:ext cx="0" cy="0"/>
+          <a:chOff x="0" y="0"/>
+          <a:chExt cx="0" cy="0"/>
+        </a:xfrm>
+      </p:grpSpPr>
+      <p:sp>
+        <p:nvSpPr>
+          <p:cNvPr id="2" name="Text 0"/>
+          <p:cNvSpPr/>
+          <p:nvPr/>
+        </p:nvSpPr>
+        <p:spPr>
+          <a:xfrm>
+            <a:off x="457200" y="502920"/>
+            <a:ext cx="11274552" cy="640080"/>
+          </a:xfrm>
+          <a:prstGeom prst="rect">
+            <a:avLst/>
+          </a:prstGeom>
+          <a:noFill/>
+          <a:ln/>
+        </p:spPr>
+        <p:txBody>
+          <a:bodyPr wrap="square" lIns="0" tIns="0" rIns="0" bIns="0" rtlCol="0" anchor="ctr"/>
+          <a:lstStyle/>
+          <a:p>
+            <a:pPr marL="0" indent="0">
+              <a:buNone/>
+            </a:pPr>
+            <a:r>
+              <a:rPr lang="en-US" sz="3200" b="1" dirty="0">
+                <a:solidFill>
+                  <a:srgbClr val="1A1A1A"/>
+                </a:solidFill>
+                <a:latin typeface="Calibri" pitchFamily="34" charset="0"/>
+                <a:ea typeface="Calibri" pitchFamily="34" charset="-122"/>
+                <a:cs typeface="Calibri" pitchFamily="34" charset="-120"/>
+              </a:rPr>
+              <a:t>Demo / Visualization</a:t>
+            </a:r>
+            <a:endParaRPr lang="en-US" sz="3200" dirty="0"/>
+          </a:p>
+        </p:txBody>
+      </p:sp>
+      <p:sp>
+        <p:nvSpPr>
+          <p:cNvPr id="3" name="Shape 1"/>
+          <p:cNvSpPr/>
+          <p:nvPr/>
+        </p:nvSpPr>
+        <p:spPr>
+          <a:xfrm>
+            <a:off x="457200" y="1188720"/>
+            <a:ext cx="11274552" cy="0"/>
+          </a:xfrm>
+          <a:prstGeom prst="line">
+            <a:avLst/>
+          </a:prstGeom>
+          <a:noFill/>
+          <a:ln w="9525">
+            <a:solidFill>
+              <a:srgbClr val="D9D9D9"/>
+            </a:solidFill>
+            <a:prstDash val="solid"/>
+          </a:ln>
+        </p:spPr>
+        <p:txBody>
+          <a:bodyPr/>
+          <a:lstStyle/>
+          <a:p>
+            <a:endParaRPr lang="en-US"/>
+          </a:p>
+        </p:txBody>
+      </p:sp>
+      <p:sp>
+        <p:nvSpPr>
+          <p:cNvPr id="4" name="Text 2"/>
+          <p:cNvSpPr/>
+          <p:nvPr/>
+        </p:nvSpPr>
+        <p:spPr>
+          <a:xfrm>
+            <a:off x="5193102" y="6126481"/>
+            <a:ext cx="902898" cy="274320"/>
+          </a:xfrm>
+          <a:prstGeom prst="rect">
+            <a:avLst/>
+          </a:prstGeom>
+          <a:noFill/>
+          <a:ln/>
+        </p:spPr>
+        <p:txBody>
+          <a:bodyPr wrap="square" lIns="0" tIns="0" rIns="0" bIns="0" rtlCol="0" anchor="ctr"/>
+          <a:lstStyle/>
+          <a:p>
+            <a:pPr marL="0" indent="0">
+              <a:buNone/>
+            </a:pPr>
+            <a:r>
+              <a:rPr lang="en-US" sz="1000" i="1" dirty="0">
+                <a:solidFill>
+                  <a:srgbClr val="6B6F76"/>
+                </a:solidFill>
+                <a:latin typeface="Calibri" pitchFamily="34" charset="0"/>
+                <a:ea typeface="Calibri" pitchFamily="34" charset="-122"/>
+                <a:cs typeface="Calibri" pitchFamily="34" charset="-120"/>
+              </a:rPr>
+              <a:t>Fallback image</a:t>
+            </a:r>
+            <a:endParaRPr lang="en-US" sz="1000" dirty="0"/>
+          </a:p>
+        </p:txBody>
+      </p:sp>
+      <p:sp>
+        <p:nvSpPr>
+          <p:cNvPr id="8" name="Text 6"/>
+          <p:cNvSpPr/>
+          <p:nvPr/>
+        </p:nvSpPr>
+        <p:spPr>
+          <a:xfrm>
+            <a:off x="457200" y="6537960"/>
+            <a:ext cx="5486400" cy="274320"/>
+          </a:xfrm>
+          <a:prstGeom prst="rect">
+            <a:avLst/>
+          </a:prstGeom>
+          <a:noFill/>
+          <a:ln/>
+        </p:spPr>
+        <p:txBody>
+          <a:bodyPr wrap="square" lIns="0" tIns="0" rIns="0" bIns="0" rtlCol="0" anchor="ctr"/>
+          <a:lstStyle/>
+          <a:p>
+            <a:pPr marL="0" indent="0">
+              <a:buNone/>
+            </a:pPr>
+            <a:r>
+              <a:rPr lang="en-US" sz="1000" i="1" dirty="0">
+                <a:solidFill>
+                  <a:srgbClr val="6B6F76"/>
+                </a:solidFill>
+                <a:latin typeface="Calibri" pitchFamily="34" charset="0"/>
+                <a:ea typeface="Calibri" pitchFamily="34" charset="-122"/>
+                <a:cs typeface="Calibri" pitchFamily="34" charset="-120"/>
+              </a:rPr>
+              <a:t>HPML · Spring 2026</a:t>
+            </a:r>
+            <a:endParaRPr lang="en-US" sz="1000" dirty="0"/>
+          </a:p>
+        </p:txBody>
+      </p:sp>
+      <p:sp>
+        <p:nvSpPr>
+          <p:cNvPr id="9" name="Text 7"/>
+          <p:cNvSpPr/>
+          <p:nvPr/>
+        </p:nvSpPr>
+        <p:spPr>
+          <a:xfrm>
+            <a:off x="6245352" y="6537960"/>
+            <a:ext cx="5486400" cy="274320"/>
+          </a:xfrm>
+          <a:prstGeom prst="rect">
+            <a:avLst/>
+          </a:prstGeom>
+          <a:noFill/>
+          <a:ln/>
+        </p:spPr>
+        <p:txBody>
+          <a:bodyPr wrap="square" lIns="0" tIns="0" rIns="0" bIns="0" rtlCol="0" anchor="ctr"/>
+          <a:lstStyle/>
+          <a:p>
+            <a:pPr marL="0" indent="0" algn="r">
+              <a:buNone/>
+            </a:pPr>
+            <a:r>
+              <a:rPr lang="en-US" sz="1000" dirty="0">
+                <a:solidFill>
+                  <a:srgbClr val="6B6F76"/>
+                </a:solidFill>
+                <a:latin typeface="Calibri" pitchFamily="34" charset="0"/>
+                <a:ea typeface="Calibri" pitchFamily="34" charset="-122"/>
+                <a:cs typeface="Calibri" pitchFamily="34" charset="-120"/>
+              </a:rPr>
+              <a:t>9 / 14</a:t>
+            </a:r>
+            <a:endParaRPr lang="en-US" sz="1000" dirty="0"/>
+          </a:p>
+        </p:txBody>
+      </p:sp>
+      <p:pic>
+        <p:nvPicPr>
+          <p:cNvPr id="11" name="Picture 10">
+            <a:extLst>
+              <a:ext uri="{FF2B5EF4-FFF2-40B4-BE49-F238E27FC236}">
+                <a16:creationId xmlns:a16="http://schemas.microsoft.com/office/drawing/2014/main" id="{D2E399AA-97FB-EA57-60BC-CF51ED36282A}"/>
+              </a:ext>
+            </a:extLst>
+          </p:cNvPr>
+          <p:cNvPicPr>
+            <a:picLocks noChangeAspect="1"/>
+          </p:cNvPicPr>
+          <p:nvPr/>
+        </p:nvPicPr>
+        <p:blipFill>
+          <a:blip r:embed="rId3"/>
+          <a:stretch>
+            <a:fillRect/>
+          </a:stretch>
+        </p:blipFill>
+        <p:spPr>
+          <a:xfrm>
+            <a:off x="759123" y="1148646"/>
+            <a:ext cx="11197087" cy="4977836"/>
+          </a:xfrm>
+          <a:prstGeom prst="rect">
+            <a:avLst/>
+          </a:prstGeom>
+        </p:spPr>
+      </p:pic>
+    </p:spTree>
+  </p:cSld>
+  <p:clrMapOvr>
+    <a:masterClrMapping/>
+  </p:clrMapOvr>
+</p:sld>
+</file>
+
+<file path=ppt/slides/slide11.xml><?xml version="1.0" encoding="utf-8"?>
 <p:sld xmlns:a="http://schemas.openxmlformats.org/drawingml/2006/main" xmlns:r="http://schemas.openxmlformats.org/officeDocument/2006/relationships" xmlns:p="http://schemas.openxmlformats.org/presentationml/2006/main">
   <p:cSld name="Slide 10">
     <p:bg>
@@ -3553,7 +3704,7 @@
 </p:sld>
 </file>
 
-<file path=ppt/slides/slide11.xml><?xml version="1.0" encoding="utf-8"?>
+<file path=ppt/slides/slide12.xml><?xml version="1.0" encoding="utf-8"?>
 <p:sld xmlns:a="http://schemas.openxmlformats.org/drawingml/2006/main" xmlns:r="http://schemas.openxmlformats.org/officeDocument/2006/relationships" xmlns:p="http://schemas.openxmlformats.org/presentationml/2006/main">
   <p:cSld name="Slide 11">
     <p:bg>
@@ -3903,7 +4054,7 @@
 </p:sld>
 </file>
 
-<file path=ppt/slides/slide12.xml><?xml version="1.0" encoding="utf-8"?>
+<file path=ppt/slides/slide13.xml><?xml version="1.0" encoding="utf-8"?>
 <p:sld xmlns:a="http://schemas.openxmlformats.org/drawingml/2006/main" xmlns:r="http://schemas.openxmlformats.org/officeDocument/2006/relationships" xmlns:p="http://schemas.openxmlformats.org/presentationml/2006/main">
   <p:cSld name="Slide 12">
     <p:bg>
@@ -4154,7 +4305,7 @@
 </p:sld>
 </file>
 
-<file path=ppt/slides/slide13.xml><?xml version="1.0" encoding="utf-8"?>
+<file path=ppt/slides/slide14.xml><?xml version="1.0" encoding="utf-8"?>
 <p:sld xmlns:a="http://schemas.openxmlformats.org/drawingml/2006/main" xmlns:r="http://schemas.openxmlformats.org/officeDocument/2006/relationships" xmlns:p="http://schemas.openxmlformats.org/presentationml/2006/main">
   <p:cSld name="Slide 13">
     <p:bg>
@@ -4293,7 +4444,7 @@
               <a:rPr lang="en-US" sz="1600" dirty="0">
                 <a:hlinkClick r:id="rId3"/>
               </a:rPr>
-              <a:t>https://github.com/AlexanderSwartz/multimodal-nanochat</a:t>
+              <a:t>https://github.com/AlexanderSwartz/nano-llava</a:t>
             </a:r>
             <a:endParaRPr lang="en-US" sz="1600" dirty="0"/>
           </a:p>
@@ -4418,7 +4569,7 @@
 </p:sld>
 </file>
 
-<file path=ppt/slides/slide14.xml><?xml version="1.0" encoding="utf-8"?>
+<file path=ppt/slides/slide15.xml><?xml version="1.0" encoding="utf-8"?>
 <p:sld xmlns:a="http://schemas.openxmlformats.org/drawingml/2006/main" xmlns:r="http://schemas.openxmlformats.org/officeDocument/2006/relationships" xmlns:p="http://schemas.openxmlformats.org/presentationml/2006/main">
   <p:cSld name="Slide 14">
     <p:bg>
@@ -4476,18 +4627,7 @@
                 <a:ea typeface="Calibri" pitchFamily="34" charset="-122"/>
                 <a:cs typeface="Calibri" pitchFamily="34" charset="-120"/>
               </a:rPr>
-              <a:t>Backup — Experimental </a:t>
-            </a:r>
-            <a:r>
-              <a:rPr lang="en-US" sz="3200" b="1" dirty="0" err="1">
-                <a:solidFill>
-                  <a:srgbClr val="1A1A1A"/>
-                </a:solidFill>
-                <a:latin typeface="Calibri" pitchFamily="34" charset="0"/>
-                <a:ea typeface="Calibri" pitchFamily="34" charset="-122"/>
-                <a:cs typeface="Calibri" pitchFamily="34" charset="-120"/>
-              </a:rPr>
-              <a:t>Setut</a:t>
+              <a:t>Backup — Experimental Setup</a:t>
             </a:r>
             <a:endParaRPr lang="en-US" sz="3200" dirty="0"/>
           </a:p>
@@ -4532,38 +4672,45 @@
           <p:nvPr>
             <p:extLst>
               <p:ext uri="{D42A27DB-BD31-4B8C-83A1-F6EECF244321}">
-                <p14:modId xmlns:p14="http://schemas.microsoft.com/office/powerpoint/2010/main" val="1615930908"/>
+                <p14:modId xmlns:p14="http://schemas.microsoft.com/office/powerpoint/2010/main" val="1972021797"/>
               </p:ext>
             </p:extLst>
           </p:nvPr>
         </p:nvGraphicFramePr>
         <p:xfrm>
           <a:off x="457200" y="1413006"/>
-          <a:ext cx="11274552" cy="4116957"/>
+          <a:ext cx="9456821" cy="3476877"/>
         </p:xfrm>
         <a:graphic>
           <a:graphicData uri="http://schemas.openxmlformats.org/drawingml/2006/table">
             <a:tbl>
               <a:tblPr/>
               <a:tblGrid>
-                <a:gridCol w="3200400">
+                <a:gridCol w="1974873">
                   <a:extLst>
                     <a:ext uri="{9D8B030D-6E8A-4147-A177-3AD203B41FA5}">
                       <a16:colId xmlns:a16="http://schemas.microsoft.com/office/drawing/2014/main" val="20000"/>
                     </a:ext>
                   </a:extLst>
                 </a:gridCol>
-                <a:gridCol w="4023360">
+                <a:gridCol w="2482698">
                   <a:extLst>
                     <a:ext uri="{9D8B030D-6E8A-4147-A177-3AD203B41FA5}">
                       <a16:colId xmlns:a16="http://schemas.microsoft.com/office/drawing/2014/main" val="20001"/>
                     </a:ext>
                   </a:extLst>
                 </a:gridCol>
-                <a:gridCol w="4050792">
+                <a:gridCol w="2499625">
                   <a:extLst>
                     <a:ext uri="{9D8B030D-6E8A-4147-A177-3AD203B41FA5}">
                       <a16:colId xmlns:a16="http://schemas.microsoft.com/office/drawing/2014/main" val="20002"/>
+                    </a:ext>
+                  </a:extLst>
+                </a:gridCol>
+                <a:gridCol w="2499625">
+                  <a:extLst>
+                    <a:ext uri="{9D8B030D-6E8A-4147-A177-3AD203B41FA5}">
+                      <a16:colId xmlns:a16="http://schemas.microsoft.com/office/drawing/2014/main" val="3849841435"/>
                     </a:ext>
                   </a:extLst>
                 </a:gridCol>
@@ -4773,6 +4920,90 @@
                     </a:solidFill>
                   </a:tcPr>
                 </a:tc>
+                <a:tc>
+                  <a:txBody>
+                    <a:bodyPr/>
+                    <a:lstStyle/>
+                    <a:p>
+                      <a:pPr marL="0" marR="0" lvl="0" indent="0" algn="l" defTabSz="914400" rtl="0" eaLnBrk="1" fontAlgn="auto" latinLnBrk="0" hangingPunct="1">
+                        <a:lnSpc>
+                          <a:spcPct val="100000"/>
+                        </a:lnSpc>
+                        <a:spcBef>
+                          <a:spcPts val="0"/>
+                        </a:spcBef>
+                        <a:spcAft>
+                          <a:spcPts val="0"/>
+                        </a:spcAft>
+                        <a:buClrTx/>
+                        <a:buSzTx/>
+                        <a:buFontTx/>
+                        <a:buNone/>
+                        <a:tabLst/>
+                        <a:defRPr/>
+                      </a:pPr>
+                      <a:r>
+                        <a:rPr lang="el-GR" sz="1400" b="1" dirty="0"/>
+                        <a:t>Δ </a:t>
+                      </a:r>
+                      <a:r>
+                        <a:rPr lang="en-US" sz="1400" b="1" dirty="0"/>
+                        <a:t>Improvement</a:t>
+                      </a:r>
+                    </a:p>
+                    <a:p>
+                      <a:pPr marL="0" indent="0">
+                        <a:buNone/>
+                      </a:pPr>
+                      <a:endParaRPr lang="en-US" sz="1300" dirty="0">
+                        <a:latin typeface="Calibri" charset="0"/>
+                        <a:ea typeface="Calibri" charset="0"/>
+                        <a:cs typeface="Calibri" charset="0"/>
+                      </a:endParaRPr>
+                    </a:p>
+                  </a:txBody>
+                  <a:tcPr>
+                    <a:lnL w="6350" cap="flat" cmpd="sng" algn="ctr">
+                      <a:solidFill>
+                        <a:srgbClr val="D9D9D9"/>
+                      </a:solidFill>
+                      <a:prstDash val="solid"/>
+                      <a:round/>
+                      <a:headEnd type="none" w="med" len="med"/>
+                      <a:tailEnd type="none" w="med" len="med"/>
+                    </a:lnL>
+                    <a:lnR w="6350" cap="flat" cmpd="sng" algn="ctr">
+                      <a:solidFill>
+                        <a:srgbClr val="D9D9D9"/>
+                      </a:solidFill>
+                      <a:prstDash val="solid"/>
+                      <a:round/>
+                      <a:headEnd type="none" w="med" len="med"/>
+                      <a:tailEnd type="none" w="med" len="med"/>
+                    </a:lnR>
+                    <a:lnT w="6350" cap="flat" cmpd="sng" algn="ctr">
+                      <a:solidFill>
+                        <a:srgbClr val="D9D9D9"/>
+                      </a:solidFill>
+                      <a:prstDash val="solid"/>
+                      <a:round/>
+                      <a:headEnd type="none" w="med" len="med"/>
+                      <a:tailEnd type="none" w="med" len="med"/>
+                    </a:lnT>
+                    <a:lnB w="6350" cap="flat" cmpd="sng" algn="ctr">
+                      <a:solidFill>
+                        <a:srgbClr val="D9D9D9"/>
+                      </a:solidFill>
+                      <a:prstDash val="solid"/>
+                      <a:round/>
+                      <a:headEnd type="none" w="med" len="med"/>
+                      <a:tailEnd type="none" w="med" len="med"/>
+                    </a:lnB>
+                    <a:solidFill>
+                      <a:srgbClr val="F2F2F2"/>
+                    </a:solidFill>
+                  </a:tcPr>
+                </a:tc>
                 <a:extLst>
                   <a:ext uri="{0D108BD9-81ED-4DB2-BD59-A6C34878D82A}">
                     <a16:rowId xmlns:a16="http://schemas.microsoft.com/office/drawing/2014/main" val="10000"/>
@@ -4908,127 +5139,6 @@
                           <a:ea typeface="Calibri" charset="0"/>
                           <a:cs typeface="Calibri" charset="0"/>
                         </a:rPr>
-                        <a:t>True</a:t>
-                      </a:r>
-                    </a:p>
-                  </a:txBody>
-                  <a:tcPr>
-                    <a:lnL w="6350" cap="flat" cmpd="sng" algn="ctr">
-                      <a:solidFill>
-                        <a:srgbClr val="D9D9D9"/>
-                      </a:solidFill>
-                      <a:prstDash val="solid"/>
-                      <a:round/>
-                      <a:headEnd type="none" w="med" len="med"/>
-                      <a:tailEnd type="none" w="med" len="med"/>
-                    </a:lnL>
-                    <a:lnR w="6350" cap="flat" cmpd="sng" algn="ctr">
-                      <a:solidFill>
-                        <a:srgbClr val="D9D9D9"/>
-                      </a:solidFill>
-                      <a:prstDash val="solid"/>
-                      <a:round/>
-                      <a:headEnd type="none" w="med" len="med"/>
-                      <a:tailEnd type="none" w="med" len="med"/>
-                    </a:lnR>
-                    <a:lnT w="6350" cap="flat" cmpd="sng" algn="ctr">
-                      <a:solidFill>
-                        <a:srgbClr val="D9D9D9"/>
-                      </a:solidFill>
-                      <a:prstDash val="solid"/>
-                      <a:round/>
-                      <a:headEnd type="none" w="med" len="med"/>
-                      <a:tailEnd type="none" w="med" len="med"/>
-                    </a:lnT>
-                    <a:lnB w="6350" cap="flat" cmpd="sng" algn="ctr">
-                      <a:solidFill>
-                        <a:srgbClr val="D9D9D9"/>
-                      </a:solidFill>
-                      <a:prstDash val="solid"/>
-                      <a:round/>
-                      <a:headEnd type="none" w="med" len="med"/>
-                      <a:tailEnd type="none" w="med" len="med"/>
-                    </a:lnB>
-                  </a:tcPr>
-                </a:tc>
-                <a:extLst>
-                  <a:ext uri="{0D108BD9-81ED-4DB2-BD59-A6C34878D82A}">
-                    <a16:rowId xmlns:a16="http://schemas.microsoft.com/office/drawing/2014/main" val="3782992760"/>
-                  </a:ext>
-                </a:extLst>
-              </a:tr>
-              <a:tr h="411480">
-                <a:tc>
-                  <a:txBody>
-                    <a:bodyPr/>
-                    <a:lstStyle/>
-                    <a:p>
-                      <a:pPr marL="0" indent="0">
-                        <a:buNone/>
-                      </a:pPr>
-                      <a:r>
-                        <a:rPr lang="en-US" sz="1200" dirty="0">
-                          <a:latin typeface="Calibri" charset="0"/>
-                          <a:ea typeface="Calibri" charset="0"/>
-                          <a:cs typeface="Calibri" charset="0"/>
-                        </a:rPr>
-                        <a:t>Persistent Workers</a:t>
-                      </a:r>
-                    </a:p>
-                  </a:txBody>
-                  <a:tcPr>
-                    <a:lnL w="6350" cap="flat" cmpd="sng" algn="ctr">
-                      <a:solidFill>
-                        <a:srgbClr val="D9D9D9"/>
-                      </a:solidFill>
-                      <a:prstDash val="solid"/>
-                      <a:round/>
-                      <a:headEnd type="none" w="med" len="med"/>
-                      <a:tailEnd type="none" w="med" len="med"/>
-                    </a:lnL>
-                    <a:lnR w="6350" cap="flat" cmpd="sng" algn="ctr">
-                      <a:solidFill>
-                        <a:srgbClr val="D9D9D9"/>
-                      </a:solidFill>
-                      <a:prstDash val="solid"/>
-                      <a:round/>
-                      <a:headEnd type="none" w="med" len="med"/>
-                      <a:tailEnd type="none" w="med" len="med"/>
-                    </a:lnR>
-                    <a:lnT w="6350" cap="flat" cmpd="sng" algn="ctr">
-                      <a:solidFill>
-                        <a:srgbClr val="D9D9D9"/>
-                      </a:solidFill>
-                      <a:prstDash val="solid"/>
-                      <a:round/>
-                      <a:headEnd type="none" w="med" len="med"/>
-                      <a:tailEnd type="none" w="med" len="med"/>
-                    </a:lnT>
-                    <a:lnB w="6350" cap="flat" cmpd="sng" algn="ctr">
-                      <a:solidFill>
-                        <a:srgbClr val="D9D9D9"/>
-                      </a:solidFill>
-                      <a:prstDash val="solid"/>
-                      <a:round/>
-                      <a:headEnd type="none" w="med" len="med"/>
-                      <a:tailEnd type="none" w="med" len="med"/>
-                    </a:lnB>
-                  </a:tcPr>
-                </a:tc>
-                <a:tc>
-                  <a:txBody>
-                    <a:bodyPr/>
-                    <a:lstStyle/>
-                    <a:p>
-                      <a:pPr marL="0" indent="0">
-                        <a:buNone/>
-                      </a:pPr>
-                      <a:r>
-                        <a:rPr lang="en-US" sz="1200" dirty="0">
-                          <a:latin typeface="Calibri" charset="0"/>
-                          <a:ea typeface="Calibri" charset="0"/>
-                          <a:cs typeface="Calibri" charset="0"/>
-                        </a:rPr>
                         <a:t>False</a:t>
                       </a:r>
                     </a:p>
@@ -5086,7 +5196,7 @@
                           <a:ea typeface="Calibri" charset="0"/>
                           <a:cs typeface="Calibri" charset="0"/>
                         </a:rPr>
-                        <a:t>True</a:t>
+                        <a:t>-1.95% Training Time</a:t>
                       </a:r>
                     </a:p>
                   </a:txBody>
@@ -5131,7 +5241,7 @@
                 </a:tc>
                 <a:extLst>
                   <a:ext uri="{0D108BD9-81ED-4DB2-BD59-A6C34878D82A}">
-                    <a16:rowId xmlns:a16="http://schemas.microsoft.com/office/drawing/2014/main" val="4144157054"/>
+                    <a16:rowId xmlns:a16="http://schemas.microsoft.com/office/drawing/2014/main" val="3782992760"/>
                   </a:ext>
                 </a:extLst>
               </a:tr>
@@ -5265,6 +5375,63 @@
                           <a:cs typeface="Calibri" charset="0"/>
                         </a:rPr>
                         <a:t>4</a:t>
+                      </a:r>
+                    </a:p>
+                  </a:txBody>
+                  <a:tcPr>
+                    <a:lnL w="6350" cap="flat" cmpd="sng" algn="ctr">
+                      <a:solidFill>
+                        <a:srgbClr val="D9D9D9"/>
+                      </a:solidFill>
+                      <a:prstDash val="solid"/>
+                      <a:round/>
+                      <a:headEnd type="none" w="med" len="med"/>
+                      <a:tailEnd type="none" w="med" len="med"/>
+                    </a:lnL>
+                    <a:lnR w="6350" cap="flat" cmpd="sng" algn="ctr">
+                      <a:solidFill>
+                        <a:srgbClr val="D9D9D9"/>
+                      </a:solidFill>
+                      <a:prstDash val="solid"/>
+                      <a:round/>
+                      <a:headEnd type="none" w="med" len="med"/>
+                      <a:tailEnd type="none" w="med" len="med"/>
+                    </a:lnR>
+                    <a:lnT w="6350" cap="flat" cmpd="sng" algn="ctr">
+                      <a:solidFill>
+                        <a:srgbClr val="D9D9D9"/>
+                      </a:solidFill>
+                      <a:prstDash val="solid"/>
+                      <a:round/>
+                      <a:headEnd type="none" w="med" len="med"/>
+                      <a:tailEnd type="none" w="med" len="med"/>
+                    </a:lnT>
+                    <a:lnB w="6350" cap="flat" cmpd="sng" algn="ctr">
+                      <a:solidFill>
+                        <a:srgbClr val="D9D9D9"/>
+                      </a:solidFill>
+                      <a:prstDash val="solid"/>
+                      <a:round/>
+                      <a:headEnd type="none" w="med" len="med"/>
+                      <a:tailEnd type="none" w="med" len="med"/>
+                    </a:lnB>
+                  </a:tcPr>
+                </a:tc>
+                <a:tc>
+                  <a:txBody>
+                    <a:bodyPr/>
+                    <a:lstStyle/>
+                    <a:p>
+                      <a:pPr marL="0" indent="0">
+                        <a:buNone/>
+                      </a:pPr>
+                      <a:r>
+                        <a:rPr lang="en-US" sz="1200" dirty="0">
+                          <a:latin typeface="Calibri" charset="0"/>
+                          <a:ea typeface="Calibri" charset="0"/>
+                          <a:cs typeface="Calibri" charset="0"/>
+                        </a:rPr>
+                        <a:t>-26.74% Training Time</a:t>
                       </a:r>
                     </a:p>
                   </a:txBody>
@@ -5485,6 +5652,63 @@
                     </a:lnB>
                   </a:tcPr>
                 </a:tc>
+                <a:tc>
+                  <a:txBody>
+                    <a:bodyPr/>
+                    <a:lstStyle/>
+                    <a:p>
+                      <a:pPr marL="0" indent="0">
+                        <a:buNone/>
+                      </a:pPr>
+                      <a:r>
+                        <a:rPr lang="en-US" sz="1200" dirty="0">
+                          <a:latin typeface="Calibri" charset="0"/>
+                          <a:ea typeface="Calibri" charset="0"/>
+                          <a:cs typeface="Calibri" charset="0"/>
+                        </a:rPr>
+                        <a:t>-83.71% Training Time</a:t>
+                      </a:r>
+                    </a:p>
+                  </a:txBody>
+                  <a:tcPr>
+                    <a:lnL w="6350" cap="flat" cmpd="sng" algn="ctr">
+                      <a:solidFill>
+                        <a:srgbClr val="D9D9D9"/>
+                      </a:solidFill>
+                      <a:prstDash val="solid"/>
+                      <a:round/>
+                      <a:headEnd type="none" w="med" len="med"/>
+                      <a:tailEnd type="none" w="med" len="med"/>
+                    </a:lnL>
+                    <a:lnR w="6350" cap="flat" cmpd="sng" algn="ctr">
+                      <a:solidFill>
+                        <a:srgbClr val="D9D9D9"/>
+                      </a:solidFill>
+                      <a:prstDash val="solid"/>
+                      <a:round/>
+                      <a:headEnd type="none" w="med" len="med"/>
+                      <a:tailEnd type="none" w="med" len="med"/>
+                    </a:lnR>
+                    <a:lnT w="6350" cap="flat" cmpd="sng" algn="ctr">
+                      <a:solidFill>
+                        <a:srgbClr val="D9D9D9"/>
+                      </a:solidFill>
+                      <a:prstDash val="solid"/>
+                      <a:round/>
+                      <a:headEnd type="none" w="med" len="med"/>
+                      <a:tailEnd type="none" w="med" len="med"/>
+                    </a:lnT>
+                    <a:lnB w="6350" cap="flat" cmpd="sng" algn="ctr">
+                      <a:solidFill>
+                        <a:srgbClr val="D9D9D9"/>
+                      </a:solidFill>
+                      <a:prstDash val="solid"/>
+                      <a:round/>
+                      <a:headEnd type="none" w="med" len="med"/>
+                      <a:tailEnd type="none" w="med" len="med"/>
+                    </a:lnB>
+                  </a:tcPr>
+                </a:tc>
                 <a:extLst>
                   <a:ext uri="{0D108BD9-81ED-4DB2-BD59-A6C34878D82A}">
                     <a16:rowId xmlns:a16="http://schemas.microsoft.com/office/drawing/2014/main" val="3973607808"/>
@@ -5508,6 +5732,71 @@
                         </a:rPr>
                         <a:t>Device Batch Size</a:t>
                       </a:r>
+                    </a:p>
+                  </a:txBody>
+                  <a:tcPr>
+                    <a:lnL w="6350" cap="flat" cmpd="sng" algn="ctr">
+                      <a:solidFill>
+                        <a:srgbClr val="D9D9D9"/>
+                      </a:solidFill>
+                      <a:prstDash val="solid"/>
+                      <a:round/>
+                      <a:headEnd type="none" w="med" len="med"/>
+                      <a:tailEnd type="none" w="med" len="med"/>
+                    </a:lnL>
+                    <a:lnR w="6350" cap="flat" cmpd="sng" algn="ctr">
+                      <a:solidFill>
+                        <a:srgbClr val="D9D9D9"/>
+                      </a:solidFill>
+                      <a:prstDash val="solid"/>
+                      <a:round/>
+                      <a:headEnd type="none" w="med" len="med"/>
+                      <a:tailEnd type="none" w="med" len="med"/>
+                    </a:lnR>
+                    <a:lnT w="6350" cap="flat" cmpd="sng" algn="ctr">
+                      <a:solidFill>
+                        <a:srgbClr val="D9D9D9"/>
+                      </a:solidFill>
+                      <a:prstDash val="solid"/>
+                      <a:round/>
+                      <a:headEnd type="none" w="med" len="med"/>
+                      <a:tailEnd type="none" w="med" len="med"/>
+                    </a:lnT>
+                    <a:lnB w="6350" cap="flat" cmpd="sng" algn="ctr">
+                      <a:solidFill>
+                        <a:srgbClr val="D9D9D9"/>
+                      </a:solidFill>
+                      <a:prstDash val="solid"/>
+                      <a:round/>
+                      <a:headEnd type="none" w="med" len="med"/>
+                      <a:tailEnd type="none" w="med" len="med"/>
+                    </a:lnB>
+                  </a:tcPr>
+                </a:tc>
+                <a:tc>
+                  <a:txBody>
+                    <a:bodyPr/>
+                    <a:lstStyle/>
+                    <a:p>
+                      <a:pPr marL="0" indent="0">
+                        <a:buNone/>
+                      </a:pPr>
+                      <a:r>
+                        <a:rPr lang="en-US" sz="1200" dirty="0">
+                          <a:solidFill>
+                            <a:srgbClr val="1A1A1A"/>
+                          </a:solidFill>
+                          <a:latin typeface="Calibri" pitchFamily="34" charset="0"/>
+                          <a:ea typeface="Calibri" pitchFamily="34" charset="-122"/>
+                          <a:cs typeface="Calibri" pitchFamily="34" charset="-120"/>
+                        </a:rPr>
+                        <a:t>64</a:t>
+                      </a:r>
+                      <a:endParaRPr lang="en-US" sz="1200" dirty="0">
+                        <a:latin typeface="Calibri" charset="0"/>
+                        <a:ea typeface="Calibri" charset="0"/>
+                        <a:cs typeface="Calibri" charset="0"/>
+                      </a:endParaRPr>
                     </a:p>
                   </a:txBody>
                   <a:tcPr>
@@ -5624,20 +5913,12 @@
                       </a:pPr>
                       <a:r>
                         <a:rPr lang="en-US" sz="1200" dirty="0">
-                          <a:solidFill>
-                            <a:srgbClr val="1A1A1A"/>
-                          </a:solidFill>
-                          <a:latin typeface="Calibri" pitchFamily="34" charset="0"/>
-                          <a:ea typeface="Calibri" pitchFamily="34" charset="-122"/>
-                          <a:cs typeface="Calibri" pitchFamily="34" charset="-120"/>
+                          <a:latin typeface="Calibri" charset="0"/>
+                          <a:ea typeface="Calibri" charset="0"/>
+                          <a:cs typeface="Calibri" charset="0"/>
                         </a:rPr>
-                        <a:t>16</a:t>
+                        <a:t>-57.51% Peak GPU Memory</a:t>
                       </a:r>
-                      <a:endParaRPr lang="en-US" sz="1200" dirty="0">
-                        <a:latin typeface="Calibri" charset="0"/>
-                        <a:ea typeface="Calibri" charset="0"/>
-                        <a:cs typeface="Calibri" charset="0"/>
-                      </a:endParaRPr>
                     </a:p>
                   </a:txBody>
                   <a:tcPr>
@@ -5881,6 +6162,63 @@
                     </a:lnB>
                   </a:tcPr>
                 </a:tc>
+                <a:tc>
+                  <a:txBody>
+                    <a:bodyPr/>
+                    <a:lstStyle/>
+                    <a:p>
+                      <a:pPr marL="0" indent="0">
+                        <a:buNone/>
+                      </a:pPr>
+                      <a:r>
+                        <a:rPr lang="en-US" sz="1200" dirty="0">
+                          <a:latin typeface="Calibri" charset="0"/>
+                          <a:ea typeface="Calibri" charset="0"/>
+                          <a:cs typeface="Calibri" charset="0"/>
+                        </a:rPr>
+                        <a:t>+19.83% Val. Semantic Similarity</a:t>
+                      </a:r>
+                    </a:p>
+                  </a:txBody>
+                  <a:tcPr>
+                    <a:lnL w="6350" cap="flat" cmpd="sng" algn="ctr">
+                      <a:solidFill>
+                        <a:srgbClr val="D9D9D9"/>
+                      </a:solidFill>
+                      <a:prstDash val="solid"/>
+                      <a:round/>
+                      <a:headEnd type="none" w="med" len="med"/>
+                      <a:tailEnd type="none" w="med" len="med"/>
+                    </a:lnL>
+                    <a:lnR w="6350" cap="flat" cmpd="sng" algn="ctr">
+                      <a:solidFill>
+                        <a:srgbClr val="D9D9D9"/>
+                      </a:solidFill>
+                      <a:prstDash val="solid"/>
+                      <a:round/>
+                      <a:headEnd type="none" w="med" len="med"/>
+                      <a:tailEnd type="none" w="med" len="med"/>
+                    </a:lnR>
+                    <a:lnT w="6350" cap="flat" cmpd="sng" algn="ctr">
+                      <a:solidFill>
+                        <a:srgbClr val="D9D9D9"/>
+                      </a:solidFill>
+                      <a:prstDash val="solid"/>
+                      <a:round/>
+                      <a:headEnd type="none" w="med" len="med"/>
+                      <a:tailEnd type="none" w="med" len="med"/>
+                    </a:lnT>
+                    <a:lnB w="6350" cap="flat" cmpd="sng" algn="ctr">
+                      <a:solidFill>
+                        <a:srgbClr val="D9D9D9"/>
+                      </a:solidFill>
+                      <a:prstDash val="solid"/>
+                      <a:round/>
+                      <a:headEnd type="none" w="med" len="med"/>
+                      <a:tailEnd type="none" w="med" len="med"/>
+                    </a:lnB>
+                  </a:tcPr>
+                </a:tc>
                 <a:extLst>
                   <a:ext uri="{0D108BD9-81ED-4DB2-BD59-A6C34878D82A}">
                     <a16:rowId xmlns:a16="http://schemas.microsoft.com/office/drawing/2014/main" val="10002"/>
@@ -6083,13 +6421,6 @@
                     </a:lnB>
                   </a:tcPr>
                 </a:tc>
-                <a:extLst>
-                  <a:ext uri="{0D108BD9-81ED-4DB2-BD59-A6C34878D82A}">
-                    <a16:rowId xmlns:a16="http://schemas.microsoft.com/office/drawing/2014/main" val="10003"/>
-                  </a:ext>
-                </a:extLst>
-              </a:tr>
-              <a:tr h="411480">
                 <a:tc>
                   <a:txBody>
                     <a:bodyPr/>
@@ -6100,144 +6431,11 @@
                       </a:pPr>
                       <a:r>
                         <a:rPr lang="en-US" sz="1200" dirty="0">
-                          <a:solidFill>
-                            <a:srgbClr val="1A1A1A"/>
-                          </a:solidFill>
-                          <a:latin typeface="Calibri" pitchFamily="34" charset="0"/>
-                          <a:ea typeface="Calibri" pitchFamily="34" charset="-122"/>
-                          <a:cs typeface="Calibri" pitchFamily="34" charset="-120"/>
+                          <a:latin typeface="Calibri" charset="0"/>
+                          <a:ea typeface="Calibri" charset="0"/>
+                          <a:cs typeface="Calibri" charset="0"/>
                         </a:rPr>
-                        <a:t>Training Iterations</a:t>
-                      </a:r>
-                      <a:endParaRPr lang="en-US" sz="1200" dirty="0">
-                        <a:latin typeface="Calibri" charset="0"/>
-                        <a:ea typeface="Calibri" charset="0"/>
-                        <a:cs typeface="Calibri" charset="0"/>
-                      </a:endParaRPr>
-                    </a:p>
-                  </a:txBody>
-                  <a:tcPr>
-                    <a:lnL w="6350" cap="flat" cmpd="sng" algn="ctr">
-                      <a:solidFill>
-                        <a:srgbClr val="D9D9D9"/>
-                      </a:solidFill>
-                      <a:prstDash val="solid"/>
-                      <a:round/>
-                      <a:headEnd type="none" w="med" len="med"/>
-                      <a:tailEnd type="none" w="med" len="med"/>
-                    </a:lnL>
-                    <a:lnR w="6350" cap="flat" cmpd="sng" algn="ctr">
-                      <a:solidFill>
-                        <a:srgbClr val="D9D9D9"/>
-                      </a:solidFill>
-                      <a:prstDash val="solid"/>
-                      <a:round/>
-                      <a:headEnd type="none" w="med" len="med"/>
-                      <a:tailEnd type="none" w="med" len="med"/>
-                    </a:lnR>
-                    <a:lnT w="6350" cap="flat" cmpd="sng" algn="ctr">
-                      <a:solidFill>
-                        <a:srgbClr val="D9D9D9"/>
-                      </a:solidFill>
-                      <a:prstDash val="solid"/>
-                      <a:round/>
-                      <a:headEnd type="none" w="med" len="med"/>
-                      <a:tailEnd type="none" w="med" len="med"/>
-                    </a:lnT>
-                    <a:lnB w="6350" cap="flat" cmpd="sng" algn="ctr">
-                      <a:solidFill>
-                        <a:srgbClr val="D9D9D9"/>
-                      </a:solidFill>
-                      <a:prstDash val="solid"/>
-                      <a:round/>
-                      <a:headEnd type="none" w="med" len="med"/>
-                      <a:tailEnd type="none" w="med" len="med"/>
-                    </a:lnB>
-                  </a:tcPr>
-                </a:tc>
-                <a:tc>
-                  <a:txBody>
-                    <a:bodyPr/>
-                    <a:lstStyle/>
-                    <a:p>
-                      <a:pPr marL="0" indent="0">
-                        <a:buNone/>
-                      </a:pPr>
-                      <a:r>
-                        <a:rPr lang="en-US" sz="1200" dirty="0">
-                          <a:solidFill>
-                            <a:srgbClr val="1A1A1A"/>
-                          </a:solidFill>
-                          <a:latin typeface="Calibri" pitchFamily="34" charset="0"/>
-                          <a:ea typeface="Calibri" pitchFamily="34" charset="-122"/>
-                          <a:cs typeface="Calibri" pitchFamily="34" charset="-120"/>
-                        </a:rPr>
-                        <a:t>1,000</a:t>
-                      </a:r>
-                      <a:endParaRPr lang="en-US" sz="1200" dirty="0">
-                        <a:latin typeface="Calibri" charset="0"/>
-                        <a:ea typeface="Calibri" charset="0"/>
-                        <a:cs typeface="Calibri" charset="0"/>
-                      </a:endParaRPr>
-                    </a:p>
-                  </a:txBody>
-                  <a:tcPr>
-                    <a:lnL w="6350" cap="flat" cmpd="sng" algn="ctr">
-                      <a:solidFill>
-                        <a:srgbClr val="D9D9D9"/>
-                      </a:solidFill>
-                      <a:prstDash val="solid"/>
-                      <a:round/>
-                      <a:headEnd type="none" w="med" len="med"/>
-                      <a:tailEnd type="none" w="med" len="med"/>
-                    </a:lnL>
-                    <a:lnR w="6350" cap="flat" cmpd="sng" algn="ctr">
-                      <a:solidFill>
-                        <a:srgbClr val="D9D9D9"/>
-                      </a:solidFill>
-                      <a:prstDash val="solid"/>
-                      <a:round/>
-                      <a:headEnd type="none" w="med" len="med"/>
-                      <a:tailEnd type="none" w="med" len="med"/>
-                    </a:lnR>
-                    <a:lnT w="6350" cap="flat" cmpd="sng" algn="ctr">
-                      <a:solidFill>
-                        <a:srgbClr val="D9D9D9"/>
-                      </a:solidFill>
-                      <a:prstDash val="solid"/>
-                      <a:round/>
-                      <a:headEnd type="none" w="med" len="med"/>
-                      <a:tailEnd type="none" w="med" len="med"/>
-                    </a:lnT>
-                    <a:lnB w="6350" cap="flat" cmpd="sng" algn="ctr">
-                      <a:solidFill>
-                        <a:srgbClr val="D9D9D9"/>
-                      </a:solidFill>
-                      <a:prstDash val="solid"/>
-                      <a:round/>
-                      <a:headEnd type="none" w="med" len="med"/>
-                      <a:tailEnd type="none" w="med" len="med"/>
-                    </a:lnB>
-                  </a:tcPr>
-                </a:tc>
-                <a:tc>
-                  <a:txBody>
-                    <a:bodyPr/>
-                    <a:lstStyle/>
-                    <a:p>
-                      <a:pPr marL="0" indent="0">
-                        <a:buNone/>
-                      </a:pPr>
-                      <a:r>
-                        <a:rPr lang="en-US" sz="1200" dirty="0">
-                          <a:solidFill>
-                            <a:srgbClr val="1A1A1A"/>
-                          </a:solidFill>
-                          <a:latin typeface="Calibri" pitchFamily="34" charset="0"/>
-                          <a:ea typeface="Calibri" pitchFamily="34" charset="-122"/>
-                          <a:cs typeface="Calibri" pitchFamily="34" charset="-120"/>
-                        </a:rPr>
-                        <a:t>500</a:t>
+                        <a:t>+ 21.35% Profiler Est. Achieved Efficiency</a:t>
                       </a:r>
                     </a:p>
                   </a:txBody>
@@ -6282,7 +6480,7 @@
                 </a:tc>
                 <a:extLst>
                   <a:ext uri="{0D108BD9-81ED-4DB2-BD59-A6C34878D82A}">
-                    <a16:rowId xmlns:a16="http://schemas.microsoft.com/office/drawing/2014/main" val="10005"/>
+                    <a16:rowId xmlns:a16="http://schemas.microsoft.com/office/drawing/2014/main" val="10003"/>
                   </a:ext>
                 </a:extLst>
               </a:tr>
@@ -6372,7 +6570,7 @@
                           <a:ea typeface="Calibri" charset="0"/>
                           <a:cs typeface="Calibri" charset="0"/>
                         </a:rPr>
-                        <a:t>8</a:t>
+                        <a:t>1</a:t>
                       </a:r>
                     </a:p>
                   </a:txBody>
@@ -6475,6 +6673,66 @@
                     </a:lnB>
                   </a:tcPr>
                 </a:tc>
+                <a:tc>
+                  <a:txBody>
+                    <a:bodyPr/>
+                    <a:lstStyle/>
+                    <a:p>
+                      <a:pPr marL="0" indent="0">
+                        <a:buNone/>
+                      </a:pPr>
+                      <a:r>
+                        <a:rPr lang="en-US" sz="1200" dirty="0">
+                          <a:solidFill>
+                            <a:srgbClr val="1A1A1A"/>
+                          </a:solidFill>
+                          <a:latin typeface="Calibri" pitchFamily="34" charset="0"/>
+                          <a:ea typeface="Calibri" pitchFamily="34" charset="-122"/>
+                          <a:cs typeface="Calibri" pitchFamily="34" charset="-120"/>
+                        </a:rPr>
+                        <a:t>+474.41% Inference Tok/Sec</a:t>
+                      </a:r>
+                    </a:p>
+                  </a:txBody>
+                  <a:tcPr>
+                    <a:lnL w="6350" cap="flat" cmpd="sng" algn="ctr">
+                      <a:solidFill>
+                        <a:srgbClr val="D9D9D9"/>
+                      </a:solidFill>
+                      <a:prstDash val="solid"/>
+                      <a:round/>
+                      <a:headEnd type="none" w="med" len="med"/>
+                      <a:tailEnd type="none" w="med" len="med"/>
+                    </a:lnL>
+                    <a:lnR w="6350" cap="flat" cmpd="sng" algn="ctr">
+                      <a:solidFill>
+                        <a:srgbClr val="D9D9D9"/>
+                      </a:solidFill>
+                      <a:prstDash val="solid"/>
+                      <a:round/>
+                      <a:headEnd type="none" w="med" len="med"/>
+                      <a:tailEnd type="none" w="med" len="med"/>
+                    </a:lnR>
+                    <a:lnT w="6350" cap="flat" cmpd="sng" algn="ctr">
+                      <a:solidFill>
+                        <a:srgbClr val="D9D9D9"/>
+                      </a:solidFill>
+                      <a:prstDash val="solid"/>
+                      <a:round/>
+                      <a:headEnd type="none" w="med" len="med"/>
+                      <a:tailEnd type="none" w="med" len="med"/>
+                    </a:lnT>
+                    <a:lnB w="6350" cap="flat" cmpd="sng" algn="ctr">
+                      <a:solidFill>
+                        <a:srgbClr val="D9D9D9"/>
+                      </a:solidFill>
+                      <a:prstDash val="solid"/>
+                      <a:round/>
+                      <a:headEnd type="none" w="med" len="med"/>
+                      <a:tailEnd type="none" w="med" len="med"/>
+                    </a:lnB>
+                  </a:tcPr>
+                </a:tc>
                 <a:extLst>
                   <a:ext uri="{0D108BD9-81ED-4DB2-BD59-A6C34878D82A}">
                     <a16:rowId xmlns:a16="http://schemas.microsoft.com/office/drawing/2014/main" val="2948936930"/>
@@ -6571,7 +6829,7 @@
 </p:sld>
 </file>
 
-<file path=ppt/slides/slide15.xml><?xml version="1.0" encoding="utf-8"?>
+<file path=ppt/slides/slide16.xml><?xml version="1.0" encoding="utf-8"?>
 <p:sld xmlns:a="http://schemas.openxmlformats.org/drawingml/2006/main" xmlns:r="http://schemas.openxmlformats.org/officeDocument/2006/relationships" xmlns:p="http://schemas.openxmlformats.org/presentationml/2006/main">
   <p:cSld>
     <p:bg>
@@ -7103,7 +7361,7 @@
 </p:sld>
 </file>
 
-<file path=ppt/slides/slide16.xml><?xml version="1.0" encoding="utf-8"?>
+<file path=ppt/slides/slide17.xml><?xml version="1.0" encoding="utf-8"?>
 <p:sld xmlns:a="http://schemas.openxmlformats.org/drawingml/2006/main" xmlns:r="http://schemas.openxmlformats.org/officeDocument/2006/relationships" xmlns:p="http://schemas.openxmlformats.org/presentationml/2006/main">
   <p:cSld>
     <p:bg>
@@ -7409,7 +7667,7 @@
 </p:sld>
 </file>
 
-<file path=ppt/slides/slide17.xml><?xml version="1.0" encoding="utf-8"?>
+<file path=ppt/slides/slide18.xml><?xml version="1.0" encoding="utf-8"?>
 <p:sld xmlns:a="http://schemas.openxmlformats.org/drawingml/2006/main" xmlns:r="http://schemas.openxmlformats.org/officeDocument/2006/relationships" xmlns:p="http://schemas.openxmlformats.org/presentationml/2006/main">
   <p:cSld>
     <p:bg>
@@ -7721,7 +7979,7 @@
 </p:sld>
 </file>
 
-<file path=ppt/slides/slide18.xml><?xml version="1.0" encoding="utf-8"?>
+<file path=ppt/slides/slide19.xml><?xml version="1.0" encoding="utf-8"?>
 <p:sld xmlns:a="http://schemas.openxmlformats.org/drawingml/2006/main" xmlns:r="http://schemas.openxmlformats.org/officeDocument/2006/relationships" xmlns:p="http://schemas.openxmlformats.org/presentationml/2006/main">
   <p:cSld>
     <p:bg>
@@ -8024,457 +8282,6 @@
     <p:extLst>
       <p:ext uri="{BB962C8B-B14F-4D97-AF65-F5344CB8AC3E}">
         <p14:creationId xmlns:p14="http://schemas.microsoft.com/office/powerpoint/2010/main" val="1888328744"/>
-      </p:ext>
-    </p:extLst>
-  </p:cSld>
-  <p:clrMapOvr>
-    <a:masterClrMapping/>
-  </p:clrMapOvr>
-</p:sld>
-</file>
-
-<file path=ppt/slides/slide19.xml><?xml version="1.0" encoding="utf-8"?>
-<p:sld xmlns:a="http://schemas.openxmlformats.org/drawingml/2006/main" xmlns:r="http://schemas.openxmlformats.org/officeDocument/2006/relationships" xmlns:p="http://schemas.openxmlformats.org/presentationml/2006/main">
-  <p:cSld>
-    <p:bg>
-      <p:bgPr>
-        <a:solidFill>
-          <a:srgbClr val="FFFFFF"/>
-        </a:solidFill>
-        <a:effectLst/>
-      </p:bgPr>
-    </p:bg>
-    <p:spTree>
-      <p:nvGrpSpPr>
-        <p:cNvPr id="1" name="">
-          <a:extLst>
-            <a:ext uri="{FF2B5EF4-FFF2-40B4-BE49-F238E27FC236}">
-              <a16:creationId xmlns:a16="http://schemas.microsoft.com/office/drawing/2014/main" id="{E182F34E-5965-D235-05C2-9DBFBE677DF4}"/>
-            </a:ext>
-          </a:extLst>
-        </p:cNvPr>
-        <p:cNvGrpSpPr/>
-        <p:nvPr/>
-      </p:nvGrpSpPr>
-      <p:grpSpPr>
-        <a:xfrm>
-          <a:off x="0" y="0"/>
-          <a:ext cx="0" cy="0"/>
-          <a:chOff x="0" y="0"/>
-          <a:chExt cx="0" cy="0"/>
-        </a:xfrm>
-      </p:grpSpPr>
-      <p:sp>
-        <p:nvSpPr>
-          <p:cNvPr id="2" name="Text 0">
-            <a:extLst>
-              <a:ext uri="{FF2B5EF4-FFF2-40B4-BE49-F238E27FC236}">
-                <a16:creationId xmlns:a16="http://schemas.microsoft.com/office/drawing/2014/main" id="{23E4A67A-D7BE-2B4A-BFEA-7804792451D1}"/>
-              </a:ext>
-            </a:extLst>
-          </p:cNvPr>
-          <p:cNvSpPr/>
-          <p:nvPr/>
-        </p:nvSpPr>
-        <p:spPr>
-          <a:xfrm>
-            <a:off x="457200" y="502920"/>
-            <a:ext cx="11274552" cy="640080"/>
-          </a:xfrm>
-          <a:prstGeom prst="rect">
-            <a:avLst/>
-          </a:prstGeom>
-          <a:noFill/>
-          <a:ln/>
-        </p:spPr>
-        <p:txBody>
-          <a:bodyPr wrap="square" lIns="0" tIns="0" rIns="0" bIns="0" rtlCol="0" anchor="ctr"/>
-          <a:lstStyle/>
-          <a:p>
-            <a:pPr marL="0" indent="0">
-              <a:buNone/>
-            </a:pPr>
-            <a:r>
-              <a:rPr lang="en-US" sz="3200" b="1" dirty="0">
-                <a:solidFill>
-                  <a:srgbClr val="1A1A1A"/>
-                </a:solidFill>
-                <a:latin typeface="Calibri" pitchFamily="34" charset="0"/>
-                <a:ea typeface="Calibri" pitchFamily="34" charset="-122"/>
-                <a:cs typeface="Calibri" pitchFamily="34" charset="-120"/>
-              </a:rPr>
-              <a:t>Backup — Device Batch Size Results</a:t>
-            </a:r>
-            <a:endParaRPr lang="en-US" sz="3200" dirty="0"/>
-          </a:p>
-        </p:txBody>
-      </p:sp>
-      <p:sp>
-        <p:nvSpPr>
-          <p:cNvPr id="3" name="Shape 1">
-            <a:extLst>
-              <a:ext uri="{FF2B5EF4-FFF2-40B4-BE49-F238E27FC236}">
-                <a16:creationId xmlns:a16="http://schemas.microsoft.com/office/drawing/2014/main" id="{FF67C94D-DBB1-6F00-F253-48FC093234BE}"/>
-              </a:ext>
-            </a:extLst>
-          </p:cNvPr>
-          <p:cNvSpPr/>
-          <p:nvPr/>
-        </p:nvSpPr>
-        <p:spPr>
-          <a:xfrm>
-            <a:off x="457200" y="1188720"/>
-            <a:ext cx="11274552" cy="0"/>
-          </a:xfrm>
-          <a:prstGeom prst="line">
-            <a:avLst/>
-          </a:prstGeom>
-          <a:noFill/>
-          <a:ln w="9525">
-            <a:solidFill>
-              <a:srgbClr val="D9D9D9"/>
-            </a:solidFill>
-            <a:prstDash val="solid"/>
-          </a:ln>
-        </p:spPr>
-        <p:txBody>
-          <a:bodyPr/>
-          <a:lstStyle/>
-          <a:p>
-            <a:endParaRPr lang="en-US"/>
-          </a:p>
-        </p:txBody>
-      </p:sp>
-      <p:sp>
-        <p:nvSpPr>
-          <p:cNvPr id="6" name="Text 3">
-            <a:extLst>
-              <a:ext uri="{FF2B5EF4-FFF2-40B4-BE49-F238E27FC236}">
-                <a16:creationId xmlns:a16="http://schemas.microsoft.com/office/drawing/2014/main" id="{C3DA45A1-EFE8-A3BB-4FFE-1B0643A069E5}"/>
-              </a:ext>
-            </a:extLst>
-          </p:cNvPr>
-          <p:cNvSpPr/>
-          <p:nvPr/>
-        </p:nvSpPr>
-        <p:spPr>
-          <a:xfrm>
-            <a:off x="457200" y="6537960"/>
-            <a:ext cx="5486400" cy="274320"/>
-          </a:xfrm>
-          <a:prstGeom prst="rect">
-            <a:avLst/>
-          </a:prstGeom>
-          <a:noFill/>
-          <a:ln/>
-        </p:spPr>
-        <p:txBody>
-          <a:bodyPr wrap="square" lIns="0" tIns="0" rIns="0" bIns="0" rtlCol="0" anchor="ctr"/>
-          <a:lstStyle/>
-          <a:p>
-            <a:pPr marL="0" indent="0">
-              <a:buNone/>
-            </a:pPr>
-            <a:r>
-              <a:rPr lang="en-US" sz="1000" i="1" dirty="0">
-                <a:solidFill>
-                  <a:srgbClr val="6B6F76"/>
-                </a:solidFill>
-                <a:latin typeface="Calibri" pitchFamily="34" charset="0"/>
-                <a:ea typeface="Calibri" pitchFamily="34" charset="-122"/>
-                <a:cs typeface="Calibri" pitchFamily="34" charset="-120"/>
-              </a:rPr>
-              <a:t>HPML · Spring 2026</a:t>
-            </a:r>
-            <a:endParaRPr lang="en-US" sz="1000" dirty="0"/>
-          </a:p>
-        </p:txBody>
-      </p:sp>
-      <p:sp>
-        <p:nvSpPr>
-          <p:cNvPr id="7" name="Text 4">
-            <a:extLst>
-              <a:ext uri="{FF2B5EF4-FFF2-40B4-BE49-F238E27FC236}">
-                <a16:creationId xmlns:a16="http://schemas.microsoft.com/office/drawing/2014/main" id="{8CD891B7-D17C-9AA5-8214-86E3D9E036BF}"/>
-              </a:ext>
-            </a:extLst>
-          </p:cNvPr>
-          <p:cNvSpPr/>
-          <p:nvPr/>
-        </p:nvSpPr>
-        <p:spPr>
-          <a:xfrm>
-            <a:off x="6245352" y="6537960"/>
-            <a:ext cx="5486400" cy="274320"/>
-          </a:xfrm>
-          <a:prstGeom prst="rect">
-            <a:avLst/>
-          </a:prstGeom>
-          <a:noFill/>
-          <a:ln/>
-        </p:spPr>
-        <p:txBody>
-          <a:bodyPr wrap="square" lIns="0" tIns="0" rIns="0" bIns="0" rtlCol="0" anchor="ctr"/>
-          <a:lstStyle/>
-          <a:p>
-            <a:pPr marL="0" indent="0" algn="r">
-              <a:buNone/>
-            </a:pPr>
-            <a:r>
-              <a:rPr lang="en-US" sz="1000" dirty="0">
-                <a:solidFill>
-                  <a:srgbClr val="6B6F76"/>
-                </a:solidFill>
-                <a:latin typeface="Calibri" pitchFamily="34" charset="0"/>
-                <a:ea typeface="Calibri" pitchFamily="34" charset="-122"/>
-                <a:cs typeface="Calibri" pitchFamily="34" charset="-120"/>
-              </a:rPr>
-              <a:t>14 / 14</a:t>
-            </a:r>
-            <a:endParaRPr lang="en-US" sz="1000" dirty="0"/>
-          </a:p>
-        </p:txBody>
-      </p:sp>
-      <p:pic>
-        <p:nvPicPr>
-          <p:cNvPr id="5" name="Picture 4">
-            <a:extLst>
-              <a:ext uri="{FF2B5EF4-FFF2-40B4-BE49-F238E27FC236}">
-                <a16:creationId xmlns:a16="http://schemas.microsoft.com/office/drawing/2014/main" id="{72E5C73B-B60B-6AB0-F2DF-68038D84A3F6}"/>
-              </a:ext>
-            </a:extLst>
-          </p:cNvPr>
-          <p:cNvPicPr>
-            <a:picLocks noChangeAspect="1"/>
-          </p:cNvPicPr>
-          <p:nvPr/>
-        </p:nvPicPr>
-        <p:blipFill>
-          <a:blip r:embed="rId3"/>
-          <a:stretch>
-            <a:fillRect/>
-          </a:stretch>
-        </p:blipFill>
-        <p:spPr>
-          <a:xfrm>
-            <a:off x="259420" y="1619117"/>
-            <a:ext cx="3902980" cy="2837906"/>
-          </a:xfrm>
-          <a:prstGeom prst="rect">
-            <a:avLst/>
-          </a:prstGeom>
-        </p:spPr>
-      </p:pic>
-      <p:sp>
-        <p:nvSpPr>
-          <p:cNvPr id="12" name="Text 3">
-            <a:extLst>
-              <a:ext uri="{FF2B5EF4-FFF2-40B4-BE49-F238E27FC236}">
-                <a16:creationId xmlns:a16="http://schemas.microsoft.com/office/drawing/2014/main" id="{95B26B40-81F2-FABA-66DB-C3879FDBFA96}"/>
-              </a:ext>
-            </a:extLst>
-          </p:cNvPr>
-          <p:cNvSpPr/>
-          <p:nvPr/>
-        </p:nvSpPr>
-        <p:spPr>
-          <a:xfrm>
-            <a:off x="7944929" y="1744110"/>
-            <a:ext cx="3987651" cy="1999753"/>
-          </a:xfrm>
-          <a:prstGeom prst="rect">
-            <a:avLst/>
-          </a:prstGeom>
-          <a:noFill/>
-          <a:ln/>
-        </p:spPr>
-        <p:txBody>
-          <a:bodyPr wrap="square" lIns="0" tIns="0" rIns="0" bIns="0" rtlCol="0" anchor="ctr"/>
-          <a:lstStyle/>
-          <a:p>
-            <a:pPr marL="0" indent="0">
-              <a:buNone/>
-            </a:pPr>
-            <a:r>
-              <a:rPr lang="en-US" sz="1600" b="1" dirty="0">
-                <a:solidFill>
-                  <a:srgbClr val="1A1A1A"/>
-                </a:solidFill>
-                <a:latin typeface="Calibri" pitchFamily="34" charset="0"/>
-                <a:ea typeface="Calibri" pitchFamily="34" charset="-122"/>
-                <a:cs typeface="Calibri" pitchFamily="34" charset="-120"/>
-              </a:rPr>
-              <a:t>Conclusions: </a:t>
-            </a:r>
-          </a:p>
-          <a:p>
-            <a:pPr marL="285750" indent="-285750">
-              <a:buFont typeface="Arial" panose="020B0604020202020204" pitchFamily="34" charset="0"/>
-              <a:buChar char="•"/>
-            </a:pPr>
-            <a:r>
-              <a:rPr lang="en-US" sz="1600" b="1" dirty="0">
-                <a:solidFill>
-                  <a:srgbClr val="1A1A1A"/>
-                </a:solidFill>
-                <a:latin typeface="Calibri" pitchFamily="34" charset="0"/>
-                <a:ea typeface="Calibri" pitchFamily="34" charset="-122"/>
-                <a:cs typeface="Calibri" pitchFamily="34" charset="-120"/>
-              </a:rPr>
-              <a:t>Increasing Device Batch Size will reduce gradient accumulation steps (mini batches), reducing overhead forward calls</a:t>
-            </a:r>
-          </a:p>
-          <a:p>
-            <a:pPr marL="285750" indent="-285750">
-              <a:buFont typeface="Arial" panose="020B0604020202020204" pitchFamily="34" charset="0"/>
-              <a:buChar char="•"/>
-            </a:pPr>
-            <a:r>
-              <a:rPr lang="en-US" sz="1600" b="1" dirty="0">
-                <a:solidFill>
-                  <a:srgbClr val="1A1A1A"/>
-                </a:solidFill>
-                <a:latin typeface="Calibri" pitchFamily="34" charset="0"/>
-                <a:ea typeface="Calibri" pitchFamily="34" charset="-122"/>
-                <a:cs typeface="Calibri" pitchFamily="34" charset="-120"/>
-              </a:rPr>
-              <a:t>Increasing Peak GPU Memory too much can cause cache spilling, increasing time spent moving data</a:t>
-            </a:r>
-          </a:p>
-        </p:txBody>
-      </p:sp>
-      <p:pic>
-        <p:nvPicPr>
-          <p:cNvPr id="14" name="Picture 13">
-            <a:extLst>
-              <a:ext uri="{FF2B5EF4-FFF2-40B4-BE49-F238E27FC236}">
-                <a16:creationId xmlns:a16="http://schemas.microsoft.com/office/drawing/2014/main" id="{F2DCFD7D-A0B3-E69C-98B0-884D604DD790}"/>
-              </a:ext>
-            </a:extLst>
-          </p:cNvPr>
-          <p:cNvPicPr>
-            <a:picLocks noChangeAspect="1"/>
-          </p:cNvPicPr>
-          <p:nvPr/>
-        </p:nvPicPr>
-        <p:blipFill>
-          <a:blip r:embed="rId4"/>
-          <a:stretch>
-            <a:fillRect/>
-          </a:stretch>
-        </p:blipFill>
-        <p:spPr>
-          <a:xfrm>
-            <a:off x="4108924" y="1619116"/>
-            <a:ext cx="3669351" cy="2837906"/>
-          </a:xfrm>
-          <a:prstGeom prst="rect">
-            <a:avLst/>
-          </a:prstGeom>
-        </p:spPr>
-      </p:pic>
-      <p:sp>
-        <p:nvSpPr>
-          <p:cNvPr id="16" name="TextBox 15">
-            <a:extLst>
-              <a:ext uri="{FF2B5EF4-FFF2-40B4-BE49-F238E27FC236}">
-                <a16:creationId xmlns:a16="http://schemas.microsoft.com/office/drawing/2014/main" id="{199BC039-3108-CF67-3581-620857239D35}"/>
-              </a:ext>
-            </a:extLst>
-          </p:cNvPr>
-          <p:cNvSpPr txBox="1"/>
-          <p:nvPr/>
-        </p:nvSpPr>
-        <p:spPr>
-          <a:xfrm>
-            <a:off x="259420" y="4483590"/>
-            <a:ext cx="4172873" cy="395173"/>
-          </a:xfrm>
-          <a:prstGeom prst="rect">
-            <a:avLst/>
-          </a:prstGeom>
-          <a:noFill/>
-        </p:spPr>
-        <p:txBody>
-          <a:bodyPr wrap="square">
-            <a:spAutoFit/>
-          </a:bodyPr>
-          <a:lstStyle/>
-          <a:p>
-            <a:pPr marL="0" marR="0">
-              <a:lnSpc>
-                <a:spcPct val="115000"/>
-              </a:lnSpc>
-              <a:spcAft>
-                <a:spcPts val="800"/>
-              </a:spcAft>
-              <a:buNone/>
-            </a:pPr>
-            <a:r>
-              <a:rPr lang="en-US" sz="1800" kern="100" dirty="0">
-                <a:effectLst/>
-                <a:latin typeface="Aptos" panose="020B0004020202020204" pitchFamily="34" charset="0"/>
-                <a:ea typeface="Aptos" panose="020B0004020202020204" pitchFamily="34" charset="0"/>
-                <a:cs typeface="Times New Roman" panose="02020603050405020304" pitchFamily="18" charset="0"/>
-              </a:rPr>
-              <a:t>Total training time at BS16: 99.62862</a:t>
-            </a:r>
-          </a:p>
-        </p:txBody>
-      </p:sp>
-      <p:sp>
-        <p:nvSpPr>
-          <p:cNvPr id="17" name="TextBox 16">
-            <a:extLst>
-              <a:ext uri="{FF2B5EF4-FFF2-40B4-BE49-F238E27FC236}">
-                <a16:creationId xmlns:a16="http://schemas.microsoft.com/office/drawing/2014/main" id="{54A30C9C-07AA-74F1-2F37-900A30D5507D}"/>
-              </a:ext>
-            </a:extLst>
-          </p:cNvPr>
-          <p:cNvSpPr txBox="1"/>
-          <p:nvPr/>
-        </p:nvSpPr>
-        <p:spPr>
-          <a:xfrm>
-            <a:off x="4108924" y="4510157"/>
-            <a:ext cx="3942991" cy="395173"/>
-          </a:xfrm>
-          <a:prstGeom prst="rect">
-            <a:avLst/>
-          </a:prstGeom>
-          <a:noFill/>
-        </p:spPr>
-        <p:txBody>
-          <a:bodyPr wrap="square">
-            <a:spAutoFit/>
-          </a:bodyPr>
-          <a:lstStyle/>
-          <a:p>
-            <a:pPr marL="0" marR="0">
-              <a:lnSpc>
-                <a:spcPct val="115000"/>
-              </a:lnSpc>
-              <a:spcAft>
-                <a:spcPts val="800"/>
-              </a:spcAft>
-              <a:buNone/>
-            </a:pPr>
-            <a:r>
-              <a:rPr lang="en-US" sz="1800" kern="100" dirty="0">
-                <a:effectLst/>
-                <a:latin typeface="Aptos" panose="020B0004020202020204" pitchFamily="34" charset="0"/>
-                <a:ea typeface="Aptos" panose="020B0004020202020204" pitchFamily="34" charset="0"/>
-                <a:cs typeface="Times New Roman" panose="02020603050405020304" pitchFamily="18" charset="0"/>
-              </a:rPr>
-              <a:t>Total training time at BS64: 130.63998</a:t>
-            </a:r>
-          </a:p>
-        </p:txBody>
-      </p:sp>
-    </p:spTree>
-    <p:extLst>
-      <p:ext uri="{BB962C8B-B14F-4D97-AF65-F5344CB8AC3E}">
-        <p14:creationId xmlns:p14="http://schemas.microsoft.com/office/powerpoint/2010/main" val="3316705889"/>
       </p:ext>
     </p:extLst>
   </p:cSld>
@@ -9098,6 +8905,457 @@
         <p:cNvPr id="1" name="">
           <a:extLst>
             <a:ext uri="{FF2B5EF4-FFF2-40B4-BE49-F238E27FC236}">
+              <a16:creationId xmlns:a16="http://schemas.microsoft.com/office/drawing/2014/main" id="{E182F34E-5965-D235-05C2-9DBFBE677DF4}"/>
+            </a:ext>
+          </a:extLst>
+        </p:cNvPr>
+        <p:cNvGrpSpPr/>
+        <p:nvPr/>
+      </p:nvGrpSpPr>
+      <p:grpSpPr>
+        <a:xfrm>
+          <a:off x="0" y="0"/>
+          <a:ext cx="0" cy="0"/>
+          <a:chOff x="0" y="0"/>
+          <a:chExt cx="0" cy="0"/>
+        </a:xfrm>
+      </p:grpSpPr>
+      <p:sp>
+        <p:nvSpPr>
+          <p:cNvPr id="2" name="Text 0">
+            <a:extLst>
+              <a:ext uri="{FF2B5EF4-FFF2-40B4-BE49-F238E27FC236}">
+                <a16:creationId xmlns:a16="http://schemas.microsoft.com/office/drawing/2014/main" id="{23E4A67A-D7BE-2B4A-BFEA-7804792451D1}"/>
+              </a:ext>
+            </a:extLst>
+          </p:cNvPr>
+          <p:cNvSpPr/>
+          <p:nvPr/>
+        </p:nvSpPr>
+        <p:spPr>
+          <a:xfrm>
+            <a:off x="457200" y="502920"/>
+            <a:ext cx="11274552" cy="640080"/>
+          </a:xfrm>
+          <a:prstGeom prst="rect">
+            <a:avLst/>
+          </a:prstGeom>
+          <a:noFill/>
+          <a:ln/>
+        </p:spPr>
+        <p:txBody>
+          <a:bodyPr wrap="square" lIns="0" tIns="0" rIns="0" bIns="0" rtlCol="0" anchor="ctr"/>
+          <a:lstStyle/>
+          <a:p>
+            <a:pPr marL="0" indent="0">
+              <a:buNone/>
+            </a:pPr>
+            <a:r>
+              <a:rPr lang="en-US" sz="3200" b="1" dirty="0">
+                <a:solidFill>
+                  <a:srgbClr val="1A1A1A"/>
+                </a:solidFill>
+                <a:latin typeface="Calibri" pitchFamily="34" charset="0"/>
+                <a:ea typeface="Calibri" pitchFamily="34" charset="-122"/>
+                <a:cs typeface="Calibri" pitchFamily="34" charset="-120"/>
+              </a:rPr>
+              <a:t>Backup — Device Batch Size Results</a:t>
+            </a:r>
+            <a:endParaRPr lang="en-US" sz="3200" dirty="0"/>
+          </a:p>
+        </p:txBody>
+      </p:sp>
+      <p:sp>
+        <p:nvSpPr>
+          <p:cNvPr id="3" name="Shape 1">
+            <a:extLst>
+              <a:ext uri="{FF2B5EF4-FFF2-40B4-BE49-F238E27FC236}">
+                <a16:creationId xmlns:a16="http://schemas.microsoft.com/office/drawing/2014/main" id="{FF67C94D-DBB1-6F00-F253-48FC093234BE}"/>
+              </a:ext>
+            </a:extLst>
+          </p:cNvPr>
+          <p:cNvSpPr/>
+          <p:nvPr/>
+        </p:nvSpPr>
+        <p:spPr>
+          <a:xfrm>
+            <a:off x="457200" y="1188720"/>
+            <a:ext cx="11274552" cy="0"/>
+          </a:xfrm>
+          <a:prstGeom prst="line">
+            <a:avLst/>
+          </a:prstGeom>
+          <a:noFill/>
+          <a:ln w="9525">
+            <a:solidFill>
+              <a:srgbClr val="D9D9D9"/>
+            </a:solidFill>
+            <a:prstDash val="solid"/>
+          </a:ln>
+        </p:spPr>
+        <p:txBody>
+          <a:bodyPr/>
+          <a:lstStyle/>
+          <a:p>
+            <a:endParaRPr lang="en-US"/>
+          </a:p>
+        </p:txBody>
+      </p:sp>
+      <p:sp>
+        <p:nvSpPr>
+          <p:cNvPr id="6" name="Text 3">
+            <a:extLst>
+              <a:ext uri="{FF2B5EF4-FFF2-40B4-BE49-F238E27FC236}">
+                <a16:creationId xmlns:a16="http://schemas.microsoft.com/office/drawing/2014/main" id="{C3DA45A1-EFE8-A3BB-4FFE-1B0643A069E5}"/>
+              </a:ext>
+            </a:extLst>
+          </p:cNvPr>
+          <p:cNvSpPr/>
+          <p:nvPr/>
+        </p:nvSpPr>
+        <p:spPr>
+          <a:xfrm>
+            <a:off x="457200" y="6537960"/>
+            <a:ext cx="5486400" cy="274320"/>
+          </a:xfrm>
+          <a:prstGeom prst="rect">
+            <a:avLst/>
+          </a:prstGeom>
+          <a:noFill/>
+          <a:ln/>
+        </p:spPr>
+        <p:txBody>
+          <a:bodyPr wrap="square" lIns="0" tIns="0" rIns="0" bIns="0" rtlCol="0" anchor="ctr"/>
+          <a:lstStyle/>
+          <a:p>
+            <a:pPr marL="0" indent="0">
+              <a:buNone/>
+            </a:pPr>
+            <a:r>
+              <a:rPr lang="en-US" sz="1000" i="1" dirty="0">
+                <a:solidFill>
+                  <a:srgbClr val="6B6F76"/>
+                </a:solidFill>
+                <a:latin typeface="Calibri" pitchFamily="34" charset="0"/>
+                <a:ea typeface="Calibri" pitchFamily="34" charset="-122"/>
+                <a:cs typeface="Calibri" pitchFamily="34" charset="-120"/>
+              </a:rPr>
+              <a:t>HPML · Spring 2026</a:t>
+            </a:r>
+            <a:endParaRPr lang="en-US" sz="1000" dirty="0"/>
+          </a:p>
+        </p:txBody>
+      </p:sp>
+      <p:sp>
+        <p:nvSpPr>
+          <p:cNvPr id="7" name="Text 4">
+            <a:extLst>
+              <a:ext uri="{FF2B5EF4-FFF2-40B4-BE49-F238E27FC236}">
+                <a16:creationId xmlns:a16="http://schemas.microsoft.com/office/drawing/2014/main" id="{8CD891B7-D17C-9AA5-8214-86E3D9E036BF}"/>
+              </a:ext>
+            </a:extLst>
+          </p:cNvPr>
+          <p:cNvSpPr/>
+          <p:nvPr/>
+        </p:nvSpPr>
+        <p:spPr>
+          <a:xfrm>
+            <a:off x="6245352" y="6537960"/>
+            <a:ext cx="5486400" cy="274320"/>
+          </a:xfrm>
+          <a:prstGeom prst="rect">
+            <a:avLst/>
+          </a:prstGeom>
+          <a:noFill/>
+          <a:ln/>
+        </p:spPr>
+        <p:txBody>
+          <a:bodyPr wrap="square" lIns="0" tIns="0" rIns="0" bIns="0" rtlCol="0" anchor="ctr"/>
+          <a:lstStyle/>
+          <a:p>
+            <a:pPr marL="0" indent="0" algn="r">
+              <a:buNone/>
+            </a:pPr>
+            <a:r>
+              <a:rPr lang="en-US" sz="1000" dirty="0">
+                <a:solidFill>
+                  <a:srgbClr val="6B6F76"/>
+                </a:solidFill>
+                <a:latin typeface="Calibri" pitchFamily="34" charset="0"/>
+                <a:ea typeface="Calibri" pitchFamily="34" charset="-122"/>
+                <a:cs typeface="Calibri" pitchFamily="34" charset="-120"/>
+              </a:rPr>
+              <a:t>14 / 14</a:t>
+            </a:r>
+            <a:endParaRPr lang="en-US" sz="1000" dirty="0"/>
+          </a:p>
+        </p:txBody>
+      </p:sp>
+      <p:pic>
+        <p:nvPicPr>
+          <p:cNvPr id="5" name="Picture 4">
+            <a:extLst>
+              <a:ext uri="{FF2B5EF4-FFF2-40B4-BE49-F238E27FC236}">
+                <a16:creationId xmlns:a16="http://schemas.microsoft.com/office/drawing/2014/main" id="{72E5C73B-B60B-6AB0-F2DF-68038D84A3F6}"/>
+              </a:ext>
+            </a:extLst>
+          </p:cNvPr>
+          <p:cNvPicPr>
+            <a:picLocks noChangeAspect="1"/>
+          </p:cNvPicPr>
+          <p:nvPr/>
+        </p:nvPicPr>
+        <p:blipFill>
+          <a:blip r:embed="rId3"/>
+          <a:stretch>
+            <a:fillRect/>
+          </a:stretch>
+        </p:blipFill>
+        <p:spPr>
+          <a:xfrm>
+            <a:off x="259420" y="1619117"/>
+            <a:ext cx="3902980" cy="2837906"/>
+          </a:xfrm>
+          <a:prstGeom prst="rect">
+            <a:avLst/>
+          </a:prstGeom>
+        </p:spPr>
+      </p:pic>
+      <p:sp>
+        <p:nvSpPr>
+          <p:cNvPr id="12" name="Text 3">
+            <a:extLst>
+              <a:ext uri="{FF2B5EF4-FFF2-40B4-BE49-F238E27FC236}">
+                <a16:creationId xmlns:a16="http://schemas.microsoft.com/office/drawing/2014/main" id="{95B26B40-81F2-FABA-66DB-C3879FDBFA96}"/>
+              </a:ext>
+            </a:extLst>
+          </p:cNvPr>
+          <p:cNvSpPr/>
+          <p:nvPr/>
+        </p:nvSpPr>
+        <p:spPr>
+          <a:xfrm>
+            <a:off x="7944929" y="1744110"/>
+            <a:ext cx="3987651" cy="1999753"/>
+          </a:xfrm>
+          <a:prstGeom prst="rect">
+            <a:avLst/>
+          </a:prstGeom>
+          <a:noFill/>
+          <a:ln/>
+        </p:spPr>
+        <p:txBody>
+          <a:bodyPr wrap="square" lIns="0" tIns="0" rIns="0" bIns="0" rtlCol="0" anchor="ctr"/>
+          <a:lstStyle/>
+          <a:p>
+            <a:pPr marL="0" indent="0">
+              <a:buNone/>
+            </a:pPr>
+            <a:r>
+              <a:rPr lang="en-US" sz="1600" b="1" dirty="0">
+                <a:solidFill>
+                  <a:srgbClr val="1A1A1A"/>
+                </a:solidFill>
+                <a:latin typeface="Calibri" pitchFamily="34" charset="0"/>
+                <a:ea typeface="Calibri" pitchFamily="34" charset="-122"/>
+                <a:cs typeface="Calibri" pitchFamily="34" charset="-120"/>
+              </a:rPr>
+              <a:t>Conclusions: </a:t>
+            </a:r>
+          </a:p>
+          <a:p>
+            <a:pPr marL="285750" indent="-285750">
+              <a:buFont typeface="Arial" panose="020B0604020202020204" pitchFamily="34" charset="0"/>
+              <a:buChar char="•"/>
+            </a:pPr>
+            <a:r>
+              <a:rPr lang="en-US" sz="1600" b="1" dirty="0">
+                <a:solidFill>
+                  <a:srgbClr val="1A1A1A"/>
+                </a:solidFill>
+                <a:latin typeface="Calibri" pitchFamily="34" charset="0"/>
+                <a:ea typeface="Calibri" pitchFamily="34" charset="-122"/>
+                <a:cs typeface="Calibri" pitchFamily="34" charset="-120"/>
+              </a:rPr>
+              <a:t>Increasing Device Batch Size will reduce gradient accumulation steps (mini batches), reducing overhead forward calls</a:t>
+            </a:r>
+          </a:p>
+          <a:p>
+            <a:pPr marL="285750" indent="-285750">
+              <a:buFont typeface="Arial" panose="020B0604020202020204" pitchFamily="34" charset="0"/>
+              <a:buChar char="•"/>
+            </a:pPr>
+            <a:r>
+              <a:rPr lang="en-US" sz="1600" b="1" dirty="0">
+                <a:solidFill>
+                  <a:srgbClr val="1A1A1A"/>
+                </a:solidFill>
+                <a:latin typeface="Calibri" pitchFamily="34" charset="0"/>
+                <a:ea typeface="Calibri" pitchFamily="34" charset="-122"/>
+                <a:cs typeface="Calibri" pitchFamily="34" charset="-120"/>
+              </a:rPr>
+              <a:t>Increasing Peak GPU Memory too much can cause cache spilling, increasing time spent moving data</a:t>
+            </a:r>
+          </a:p>
+        </p:txBody>
+      </p:sp>
+      <p:pic>
+        <p:nvPicPr>
+          <p:cNvPr id="14" name="Picture 13">
+            <a:extLst>
+              <a:ext uri="{FF2B5EF4-FFF2-40B4-BE49-F238E27FC236}">
+                <a16:creationId xmlns:a16="http://schemas.microsoft.com/office/drawing/2014/main" id="{F2DCFD7D-A0B3-E69C-98B0-884D604DD790}"/>
+              </a:ext>
+            </a:extLst>
+          </p:cNvPr>
+          <p:cNvPicPr>
+            <a:picLocks noChangeAspect="1"/>
+          </p:cNvPicPr>
+          <p:nvPr/>
+        </p:nvPicPr>
+        <p:blipFill>
+          <a:blip r:embed="rId4"/>
+          <a:stretch>
+            <a:fillRect/>
+          </a:stretch>
+        </p:blipFill>
+        <p:spPr>
+          <a:xfrm>
+            <a:off x="4108924" y="1619116"/>
+            <a:ext cx="3669351" cy="2837906"/>
+          </a:xfrm>
+          <a:prstGeom prst="rect">
+            <a:avLst/>
+          </a:prstGeom>
+        </p:spPr>
+      </p:pic>
+      <p:sp>
+        <p:nvSpPr>
+          <p:cNvPr id="16" name="TextBox 15">
+            <a:extLst>
+              <a:ext uri="{FF2B5EF4-FFF2-40B4-BE49-F238E27FC236}">
+                <a16:creationId xmlns:a16="http://schemas.microsoft.com/office/drawing/2014/main" id="{199BC039-3108-CF67-3581-620857239D35}"/>
+              </a:ext>
+            </a:extLst>
+          </p:cNvPr>
+          <p:cNvSpPr txBox="1"/>
+          <p:nvPr/>
+        </p:nvSpPr>
+        <p:spPr>
+          <a:xfrm>
+            <a:off x="259420" y="4483590"/>
+            <a:ext cx="4172873" cy="395173"/>
+          </a:xfrm>
+          <a:prstGeom prst="rect">
+            <a:avLst/>
+          </a:prstGeom>
+          <a:noFill/>
+        </p:spPr>
+        <p:txBody>
+          <a:bodyPr wrap="square">
+            <a:spAutoFit/>
+          </a:bodyPr>
+          <a:lstStyle/>
+          <a:p>
+            <a:pPr marL="0" marR="0">
+              <a:lnSpc>
+                <a:spcPct val="115000"/>
+              </a:lnSpc>
+              <a:spcAft>
+                <a:spcPts val="800"/>
+              </a:spcAft>
+              <a:buNone/>
+            </a:pPr>
+            <a:r>
+              <a:rPr lang="en-US" sz="1800" kern="100" dirty="0">
+                <a:effectLst/>
+                <a:latin typeface="Aptos" panose="020B0004020202020204" pitchFamily="34" charset="0"/>
+                <a:ea typeface="Aptos" panose="020B0004020202020204" pitchFamily="34" charset="0"/>
+                <a:cs typeface="Times New Roman" panose="02020603050405020304" pitchFamily="18" charset="0"/>
+              </a:rPr>
+              <a:t>Total training time at BS16: 99.62862</a:t>
+            </a:r>
+          </a:p>
+        </p:txBody>
+      </p:sp>
+      <p:sp>
+        <p:nvSpPr>
+          <p:cNvPr id="17" name="TextBox 16">
+            <a:extLst>
+              <a:ext uri="{FF2B5EF4-FFF2-40B4-BE49-F238E27FC236}">
+                <a16:creationId xmlns:a16="http://schemas.microsoft.com/office/drawing/2014/main" id="{54A30C9C-07AA-74F1-2F37-900A30D5507D}"/>
+              </a:ext>
+            </a:extLst>
+          </p:cNvPr>
+          <p:cNvSpPr txBox="1"/>
+          <p:nvPr/>
+        </p:nvSpPr>
+        <p:spPr>
+          <a:xfrm>
+            <a:off x="4108924" y="4510157"/>
+            <a:ext cx="3942991" cy="395173"/>
+          </a:xfrm>
+          <a:prstGeom prst="rect">
+            <a:avLst/>
+          </a:prstGeom>
+          <a:noFill/>
+        </p:spPr>
+        <p:txBody>
+          <a:bodyPr wrap="square">
+            <a:spAutoFit/>
+          </a:bodyPr>
+          <a:lstStyle/>
+          <a:p>
+            <a:pPr marL="0" marR="0">
+              <a:lnSpc>
+                <a:spcPct val="115000"/>
+              </a:lnSpc>
+              <a:spcAft>
+                <a:spcPts val="800"/>
+              </a:spcAft>
+              <a:buNone/>
+            </a:pPr>
+            <a:r>
+              <a:rPr lang="en-US" sz="1800" kern="100" dirty="0">
+                <a:effectLst/>
+                <a:latin typeface="Aptos" panose="020B0004020202020204" pitchFamily="34" charset="0"/>
+                <a:ea typeface="Aptos" panose="020B0004020202020204" pitchFamily="34" charset="0"/>
+                <a:cs typeface="Times New Roman" panose="02020603050405020304" pitchFamily="18" charset="0"/>
+              </a:rPr>
+              <a:t>Total training time at BS64: 130.63998</a:t>
+            </a:r>
+          </a:p>
+        </p:txBody>
+      </p:sp>
+    </p:spTree>
+    <p:extLst>
+      <p:ext uri="{BB962C8B-B14F-4D97-AF65-F5344CB8AC3E}">
+        <p14:creationId xmlns:p14="http://schemas.microsoft.com/office/powerpoint/2010/main" val="3316705889"/>
+      </p:ext>
+    </p:extLst>
+  </p:cSld>
+  <p:clrMapOvr>
+    <a:masterClrMapping/>
+  </p:clrMapOvr>
+</p:sld>
+</file>
+
+<file path=ppt/slides/slide21.xml><?xml version="1.0" encoding="utf-8"?>
+<p:sld xmlns:a="http://schemas.openxmlformats.org/drawingml/2006/main" xmlns:r="http://schemas.openxmlformats.org/officeDocument/2006/relationships" xmlns:p="http://schemas.openxmlformats.org/presentationml/2006/main">
+  <p:cSld>
+    <p:bg>
+      <p:bgPr>
+        <a:solidFill>
+          <a:srgbClr val="FFFFFF"/>
+        </a:solidFill>
+        <a:effectLst/>
+      </p:bgPr>
+    </p:bg>
+    <p:spTree>
+      <p:nvGrpSpPr>
+        <p:cNvPr id="1" name="">
+          <a:extLst>
+            <a:ext uri="{FF2B5EF4-FFF2-40B4-BE49-F238E27FC236}">
               <a16:creationId xmlns:a16="http://schemas.microsoft.com/office/drawing/2014/main" id="{F59EB3F4-D410-A161-F120-13DA2FEAA6A5}"/>
             </a:ext>
           </a:extLst>
@@ -9612,1857 +9870,7 @@
 </p:sld>
 </file>
 
-<file path=ppt/slides/slide21.xml><?xml version="1.0" encoding="utf-8"?>
-<p:sld xmlns:a="http://schemas.openxmlformats.org/drawingml/2006/main" xmlns:r="http://schemas.openxmlformats.org/officeDocument/2006/relationships" xmlns:p="http://schemas.openxmlformats.org/presentationml/2006/main">
-  <p:cSld>
-    <p:spTree>
-      <p:nvGrpSpPr>
-        <p:cNvPr id="1" name="">
-          <a:extLst>
-            <a:ext uri="{FF2B5EF4-FFF2-40B4-BE49-F238E27FC236}">
-              <a16:creationId xmlns:a16="http://schemas.microsoft.com/office/drawing/2014/main" id="{442606D3-5F39-1F33-AEB6-788911552A74}"/>
-            </a:ext>
-          </a:extLst>
-        </p:cNvPr>
-        <p:cNvGrpSpPr/>
-        <p:nvPr/>
-      </p:nvGrpSpPr>
-      <p:grpSpPr>
-        <a:xfrm>
-          <a:off x="0" y="0"/>
-          <a:ext cx="0" cy="0"/>
-          <a:chOff x="0" y="0"/>
-          <a:chExt cx="0" cy="0"/>
-        </a:xfrm>
-      </p:grpSpPr>
-      <p:sp>
-        <p:nvSpPr>
-          <p:cNvPr id="2" name="Text 0">
-            <a:extLst>
-              <a:ext uri="{FF2B5EF4-FFF2-40B4-BE49-F238E27FC236}">
-                <a16:creationId xmlns:a16="http://schemas.microsoft.com/office/drawing/2014/main" id="{45D2AE53-269C-3E75-411F-B0A3D86CF1B7}"/>
-              </a:ext>
-            </a:extLst>
-          </p:cNvPr>
-          <p:cNvSpPr/>
-          <p:nvPr/>
-        </p:nvSpPr>
-        <p:spPr>
-          <a:xfrm>
-            <a:off x="457200" y="502920"/>
-            <a:ext cx="11274552" cy="640080"/>
-          </a:xfrm>
-          <a:prstGeom prst="rect">
-            <a:avLst/>
-          </a:prstGeom>
-          <a:noFill/>
-          <a:ln/>
-        </p:spPr>
-        <p:txBody>
-          <a:bodyPr wrap="square" lIns="0" tIns="0" rIns="0" bIns="0" rtlCol="0" anchor="ctr"/>
-          <a:lstStyle/>
-          <a:p>
-            <a:pPr marL="0" indent="0">
-              <a:buNone/>
-            </a:pPr>
-            <a:r>
-              <a:rPr lang="en-US" sz="3200" b="1" dirty="0">
-                <a:solidFill>
-                  <a:srgbClr val="1A1A1A"/>
-                </a:solidFill>
-                <a:latin typeface="Calibri" pitchFamily="34" charset="0"/>
-                <a:ea typeface="Calibri" pitchFamily="34" charset="-122"/>
-                <a:cs typeface="Calibri" pitchFamily="34" charset="-120"/>
-              </a:rPr>
-              <a:t>Technical Approach — Architecture</a:t>
-            </a:r>
-            <a:endParaRPr lang="en-US" sz="3200" dirty="0"/>
-          </a:p>
-        </p:txBody>
-      </p:sp>
-      <p:sp>
-        <p:nvSpPr>
-          <p:cNvPr id="3" name="Shape 1">
-            <a:extLst>
-              <a:ext uri="{FF2B5EF4-FFF2-40B4-BE49-F238E27FC236}">
-                <a16:creationId xmlns:a16="http://schemas.microsoft.com/office/drawing/2014/main" id="{0B22F547-049A-D8F5-18CA-015AE51C2BAD}"/>
-              </a:ext>
-            </a:extLst>
-          </p:cNvPr>
-          <p:cNvSpPr/>
-          <p:nvPr/>
-        </p:nvSpPr>
-        <p:spPr>
-          <a:xfrm>
-            <a:off x="457200" y="1188720"/>
-            <a:ext cx="11274552" cy="0"/>
-          </a:xfrm>
-          <a:prstGeom prst="line">
-            <a:avLst/>
-          </a:prstGeom>
-          <a:noFill/>
-          <a:ln w="9525">
-            <a:solidFill>
-              <a:srgbClr val="D9D9D9"/>
-            </a:solidFill>
-            <a:prstDash val="solid"/>
-          </a:ln>
-        </p:spPr>
-        <p:txBody>
-          <a:bodyPr/>
-          <a:lstStyle/>
-          <a:p>
-            <a:endParaRPr lang="en-US"/>
-          </a:p>
-        </p:txBody>
-      </p:sp>
-      <p:sp>
-        <p:nvSpPr>
-          <p:cNvPr id="14" name="Text 12">
-            <a:extLst>
-              <a:ext uri="{FF2B5EF4-FFF2-40B4-BE49-F238E27FC236}">
-                <a16:creationId xmlns:a16="http://schemas.microsoft.com/office/drawing/2014/main" id="{A26B0661-ECB2-A676-4552-919A5D6C71D3}"/>
-              </a:ext>
-            </a:extLst>
-          </p:cNvPr>
-          <p:cNvSpPr/>
-          <p:nvPr/>
-        </p:nvSpPr>
-        <p:spPr>
-          <a:xfrm>
-            <a:off x="457200" y="6537960"/>
-            <a:ext cx="5486400" cy="274320"/>
-          </a:xfrm>
-          <a:prstGeom prst="rect">
-            <a:avLst/>
-          </a:prstGeom>
-          <a:noFill/>
-          <a:ln/>
-        </p:spPr>
-        <p:txBody>
-          <a:bodyPr wrap="square" lIns="0" tIns="0" rIns="0" bIns="0" rtlCol="0" anchor="ctr"/>
-          <a:lstStyle/>
-          <a:p>
-            <a:pPr marL="0" indent="0">
-              <a:buNone/>
-            </a:pPr>
-            <a:r>
-              <a:rPr lang="en-US" sz="1000" i="1" dirty="0">
-                <a:solidFill>
-                  <a:srgbClr val="6B6F76"/>
-                </a:solidFill>
-                <a:latin typeface="Calibri" pitchFamily="34" charset="0"/>
-                <a:ea typeface="Calibri" pitchFamily="34" charset="-122"/>
-                <a:cs typeface="Calibri" pitchFamily="34" charset="-120"/>
-              </a:rPr>
-              <a:t>HPML · Spring 2026</a:t>
-            </a:r>
-            <a:endParaRPr lang="en-US" sz="1000" dirty="0"/>
-          </a:p>
-        </p:txBody>
-      </p:sp>
-      <p:sp>
-        <p:nvSpPr>
-          <p:cNvPr id="15" name="Text 13">
-            <a:extLst>
-              <a:ext uri="{FF2B5EF4-FFF2-40B4-BE49-F238E27FC236}">
-                <a16:creationId xmlns:a16="http://schemas.microsoft.com/office/drawing/2014/main" id="{1F94729C-20A4-82C4-DFB6-92DA4E277BE7}"/>
-              </a:ext>
-            </a:extLst>
-          </p:cNvPr>
-          <p:cNvSpPr/>
-          <p:nvPr/>
-        </p:nvSpPr>
-        <p:spPr>
-          <a:xfrm>
-            <a:off x="6245352" y="6537960"/>
-            <a:ext cx="5486400" cy="274320"/>
-          </a:xfrm>
-          <a:prstGeom prst="rect">
-            <a:avLst/>
-          </a:prstGeom>
-          <a:noFill/>
-          <a:ln/>
-        </p:spPr>
-        <p:txBody>
-          <a:bodyPr wrap="square" lIns="0" tIns="0" rIns="0" bIns="0" rtlCol="0" anchor="ctr"/>
-          <a:lstStyle/>
-          <a:p>
-            <a:pPr marL="0" indent="0" algn="r">
-              <a:buNone/>
-            </a:pPr>
-            <a:r>
-              <a:rPr lang="en-US" sz="1000" dirty="0">
-                <a:solidFill>
-                  <a:srgbClr val="6B6F76"/>
-                </a:solidFill>
-                <a:latin typeface="Calibri" pitchFamily="34" charset="0"/>
-                <a:ea typeface="Calibri" pitchFamily="34" charset="-122"/>
-                <a:cs typeface="Calibri" pitchFamily="34" charset="-120"/>
-              </a:rPr>
-              <a:t>3 / 14</a:t>
-            </a:r>
-            <a:endParaRPr lang="en-US" sz="1000" dirty="0"/>
-          </a:p>
-        </p:txBody>
-      </p:sp>
-      <p:grpSp>
-        <p:nvGrpSpPr>
-          <p:cNvPr id="54" name="Group 53">
-            <a:extLst>
-              <a:ext uri="{FF2B5EF4-FFF2-40B4-BE49-F238E27FC236}">
-                <a16:creationId xmlns:a16="http://schemas.microsoft.com/office/drawing/2014/main" id="{1E55E934-DE3C-27C6-1276-F7B7B50D1974}"/>
-              </a:ext>
-            </a:extLst>
-          </p:cNvPr>
-          <p:cNvGrpSpPr/>
-          <p:nvPr/>
-        </p:nvGrpSpPr>
-        <p:grpSpPr>
-          <a:xfrm>
-            <a:off x="549813" y="1324758"/>
-            <a:ext cx="11253638" cy="5077165"/>
-            <a:chOff x="465837" y="1397300"/>
-            <a:chExt cx="11253638" cy="5077165"/>
-          </a:xfrm>
-        </p:grpSpPr>
-        <p:grpSp>
-          <p:nvGrpSpPr>
-            <p:cNvPr id="4" name="Group 3">
-              <a:extLst>
-                <a:ext uri="{FF2B5EF4-FFF2-40B4-BE49-F238E27FC236}">
-                  <a16:creationId xmlns:a16="http://schemas.microsoft.com/office/drawing/2014/main" id="{D8465471-9985-2355-90A5-D3614F9D7292}"/>
-                </a:ext>
-              </a:extLst>
-            </p:cNvPr>
-            <p:cNvGrpSpPr/>
-            <p:nvPr/>
-          </p:nvGrpSpPr>
-          <p:grpSpPr>
-            <a:xfrm>
-              <a:off x="780259" y="1397300"/>
-              <a:ext cx="10326681" cy="2795137"/>
-              <a:chOff x="642809" y="205319"/>
-              <a:chExt cx="11182956" cy="3327592"/>
-            </a:xfrm>
-          </p:grpSpPr>
-          <p:sp>
-            <p:nvSpPr>
-              <p:cNvPr id="16" name="Rectangle 15">
-                <a:extLst>
-                  <a:ext uri="{FF2B5EF4-FFF2-40B4-BE49-F238E27FC236}">
-                    <a16:creationId xmlns:a16="http://schemas.microsoft.com/office/drawing/2014/main" id="{65BAF5D7-8DFB-EDDD-DB60-60A86F776AAF}"/>
-                  </a:ext>
-                </a:extLst>
-              </p:cNvPr>
-              <p:cNvSpPr/>
-              <p:nvPr/>
-            </p:nvSpPr>
-            <p:spPr>
-              <a:xfrm>
-                <a:off x="642809" y="1104901"/>
-                <a:ext cx="1135378" cy="1135379"/>
-              </a:xfrm>
-              <a:prstGeom prst="rect">
-                <a:avLst/>
-              </a:prstGeom>
-              <a:noFill/>
-            </p:spPr>
-            <p:style>
-              <a:lnRef idx="2">
-                <a:schemeClr val="accent1">
-                  <a:shade val="15000"/>
-                </a:schemeClr>
-              </a:lnRef>
-              <a:fillRef idx="1">
-                <a:schemeClr val="accent1"/>
-              </a:fillRef>
-              <a:effectRef idx="0">
-                <a:schemeClr val="accent1"/>
-              </a:effectRef>
-              <a:fontRef idx="minor">
-                <a:schemeClr val="lt1"/>
-              </a:fontRef>
-            </p:style>
-            <p:txBody>
-              <a:bodyPr rtlCol="0" anchor="ctr"/>
-              <a:lstStyle/>
-              <a:p>
-                <a:pPr algn="ctr"/>
-                <a:endParaRPr lang="en-US" sz="1500"/>
-              </a:p>
-            </p:txBody>
-          </p:sp>
-          <p:sp>
-            <p:nvSpPr>
-              <p:cNvPr id="17" name="Rectangle 16">
-                <a:extLst>
-                  <a:ext uri="{FF2B5EF4-FFF2-40B4-BE49-F238E27FC236}">
-                    <a16:creationId xmlns:a16="http://schemas.microsoft.com/office/drawing/2014/main" id="{B4DCB964-2998-F095-AE38-D8680D48D6AE}"/>
-                  </a:ext>
-                </a:extLst>
-              </p:cNvPr>
-              <p:cNvSpPr/>
-              <p:nvPr/>
-            </p:nvSpPr>
-            <p:spPr>
-              <a:xfrm>
-                <a:off x="1781087" y="1112520"/>
-                <a:ext cx="1135380" cy="1135379"/>
-              </a:xfrm>
-              <a:prstGeom prst="rect">
-                <a:avLst/>
-              </a:prstGeom>
-              <a:noFill/>
-            </p:spPr>
-            <p:style>
-              <a:lnRef idx="2">
-                <a:schemeClr val="accent1">
-                  <a:shade val="15000"/>
-                </a:schemeClr>
-              </a:lnRef>
-              <a:fillRef idx="1">
-                <a:schemeClr val="accent1"/>
-              </a:fillRef>
-              <a:effectRef idx="0">
-                <a:schemeClr val="accent1"/>
-              </a:effectRef>
-              <a:fontRef idx="minor">
-                <a:schemeClr val="lt1"/>
-              </a:fontRef>
-            </p:style>
-            <p:txBody>
-              <a:bodyPr rtlCol="0" anchor="ctr"/>
-              <a:lstStyle/>
-              <a:p>
-                <a:pPr algn="ctr"/>
-                <a:endParaRPr lang="en-US" sz="1500"/>
-              </a:p>
-            </p:txBody>
-          </p:sp>
-          <p:sp>
-            <p:nvSpPr>
-              <p:cNvPr id="18" name="Rectangle 17">
-                <a:extLst>
-                  <a:ext uri="{FF2B5EF4-FFF2-40B4-BE49-F238E27FC236}">
-                    <a16:creationId xmlns:a16="http://schemas.microsoft.com/office/drawing/2014/main" id="{19E31E24-D1FF-F9A9-D225-CFA959FADC1C}"/>
-                  </a:ext>
-                </a:extLst>
-              </p:cNvPr>
-              <p:cNvSpPr/>
-              <p:nvPr/>
-            </p:nvSpPr>
-            <p:spPr>
-              <a:xfrm>
-                <a:off x="643341" y="2240280"/>
-                <a:ext cx="1135380" cy="1135379"/>
-              </a:xfrm>
-              <a:prstGeom prst="rect">
-                <a:avLst/>
-              </a:prstGeom>
-              <a:noFill/>
-            </p:spPr>
-            <p:style>
-              <a:lnRef idx="2">
-                <a:schemeClr val="accent1">
-                  <a:shade val="15000"/>
-                </a:schemeClr>
-              </a:lnRef>
-              <a:fillRef idx="1">
-                <a:schemeClr val="accent1"/>
-              </a:fillRef>
-              <a:effectRef idx="0">
-                <a:schemeClr val="accent1"/>
-              </a:effectRef>
-              <a:fontRef idx="minor">
-                <a:schemeClr val="lt1"/>
-              </a:fontRef>
-            </p:style>
-            <p:txBody>
-              <a:bodyPr rtlCol="0" anchor="ctr"/>
-              <a:lstStyle/>
-              <a:p>
-                <a:pPr algn="ctr"/>
-                <a:endParaRPr lang="en-US" sz="1500"/>
-              </a:p>
-            </p:txBody>
-          </p:sp>
-          <p:sp>
-            <p:nvSpPr>
-              <p:cNvPr id="19" name="Rectangle 18">
-                <a:extLst>
-                  <a:ext uri="{FF2B5EF4-FFF2-40B4-BE49-F238E27FC236}">
-                    <a16:creationId xmlns:a16="http://schemas.microsoft.com/office/drawing/2014/main" id="{87829CFF-18EC-B774-3198-96B63A015139}"/>
-                  </a:ext>
-                </a:extLst>
-              </p:cNvPr>
-              <p:cNvSpPr/>
-              <p:nvPr/>
-            </p:nvSpPr>
-            <p:spPr>
-              <a:xfrm>
-                <a:off x="1784416" y="2255024"/>
-                <a:ext cx="1135380" cy="1135379"/>
-              </a:xfrm>
-              <a:prstGeom prst="rect">
-                <a:avLst/>
-              </a:prstGeom>
-              <a:noFill/>
-            </p:spPr>
-            <p:style>
-              <a:lnRef idx="2">
-                <a:schemeClr val="accent1">
-                  <a:shade val="15000"/>
-                </a:schemeClr>
-              </a:lnRef>
-              <a:fillRef idx="1">
-                <a:schemeClr val="accent1"/>
-              </a:fillRef>
-              <a:effectRef idx="0">
-                <a:schemeClr val="accent1"/>
-              </a:effectRef>
-              <a:fontRef idx="minor">
-                <a:schemeClr val="lt1"/>
-              </a:fontRef>
-            </p:style>
-            <p:txBody>
-              <a:bodyPr rtlCol="0" anchor="ctr"/>
-              <a:lstStyle/>
-              <a:p>
-                <a:pPr algn="ctr"/>
-                <a:endParaRPr lang="en-US" sz="1500"/>
-              </a:p>
-            </p:txBody>
-          </p:sp>
-          <p:sp>
-            <p:nvSpPr>
-              <p:cNvPr id="20" name="TextBox 19">
-                <a:extLst>
-                  <a:ext uri="{FF2B5EF4-FFF2-40B4-BE49-F238E27FC236}">
-                    <a16:creationId xmlns:a16="http://schemas.microsoft.com/office/drawing/2014/main" id="{F36AA469-4EBF-F975-4AFA-468C920121B0}"/>
-                  </a:ext>
-                </a:extLst>
-              </p:cNvPr>
-              <p:cNvSpPr txBox="1"/>
-              <p:nvPr/>
-            </p:nvSpPr>
-            <p:spPr>
-              <a:xfrm>
-                <a:off x="657506" y="292999"/>
-                <a:ext cx="2491741" cy="769453"/>
-              </a:xfrm>
-              <a:prstGeom prst="rect">
-                <a:avLst/>
-              </a:prstGeom>
-              <a:noFill/>
-            </p:spPr>
-            <p:txBody>
-              <a:bodyPr wrap="square" rtlCol="0">
-                <a:spAutoFit/>
-              </a:bodyPr>
-              <a:lstStyle/>
-              <a:p>
-                <a:r>
-                  <a:rPr lang="en-US" i="1" dirty="0"/>
-                  <a:t>Image split into patches</a:t>
-                </a:r>
-              </a:p>
-            </p:txBody>
-          </p:sp>
-          <p:sp>
-            <p:nvSpPr>
-              <p:cNvPr id="21" name="TextBox 20">
-                <a:extLst>
-                  <a:ext uri="{FF2B5EF4-FFF2-40B4-BE49-F238E27FC236}">
-                    <a16:creationId xmlns:a16="http://schemas.microsoft.com/office/drawing/2014/main" id="{C6502352-D232-5CD5-FD48-ABBC27E23C0D}"/>
-                  </a:ext>
-                </a:extLst>
-              </p:cNvPr>
-              <p:cNvSpPr txBox="1"/>
-              <p:nvPr/>
-            </p:nvSpPr>
-            <p:spPr>
-              <a:xfrm>
-                <a:off x="4931092" y="586085"/>
-                <a:ext cx="2329815" cy="439687"/>
-              </a:xfrm>
-              <a:prstGeom prst="rect">
-                <a:avLst/>
-              </a:prstGeom>
-              <a:noFill/>
-            </p:spPr>
-            <p:txBody>
-              <a:bodyPr wrap="square" rtlCol="0">
-                <a:spAutoFit/>
-              </a:bodyPr>
-              <a:lstStyle/>
-              <a:p>
-                <a:r>
-                  <a:rPr lang="en-US" i="1" dirty="0"/>
-                  <a:t>Image embeddings</a:t>
-                </a:r>
-              </a:p>
-            </p:txBody>
-          </p:sp>
-          <p:sp>
-            <p:nvSpPr>
-              <p:cNvPr id="22" name="TextBox 21">
-                <a:extLst>
-                  <a:ext uri="{FF2B5EF4-FFF2-40B4-BE49-F238E27FC236}">
-                    <a16:creationId xmlns:a16="http://schemas.microsoft.com/office/drawing/2014/main" id="{213B6C56-A986-B705-0976-D1CC0F7D2E8E}"/>
-                  </a:ext>
-                </a:extLst>
-              </p:cNvPr>
-              <p:cNvSpPr txBox="1"/>
-              <p:nvPr/>
-            </p:nvSpPr>
-            <p:spPr>
-              <a:xfrm>
-                <a:off x="5105400" y="1120140"/>
-                <a:ext cx="777240" cy="1015663"/>
-              </a:xfrm>
-              <a:prstGeom prst="rect">
-                <a:avLst/>
-              </a:prstGeom>
-              <a:noFill/>
-            </p:spPr>
-            <p:txBody>
-              <a:bodyPr wrap="square" rtlCol="0">
-                <a:spAutoFit/>
-              </a:bodyPr>
-              <a:lstStyle/>
-              <a:p>
-                <a:r>
-                  <a:rPr lang="en-US" sz="1500" dirty="0"/>
-                  <a:t>[.15</a:t>
-                </a:r>
-                <a:br>
-                  <a:rPr lang="en-US" sz="1500" dirty="0"/>
-                </a:br>
-                <a:r>
-                  <a:rPr lang="en-US" sz="1500" dirty="0"/>
-                  <a:t>-.61</a:t>
-                </a:r>
-                <a:br>
-                  <a:rPr lang="en-US" sz="1500" dirty="0"/>
-                </a:br>
-                <a:r>
-                  <a:rPr lang="en-US" sz="1500" dirty="0"/>
-                  <a:t>.63</a:t>
-                </a:r>
-                <a:br>
-                  <a:rPr lang="en-US" sz="1500" dirty="0"/>
-                </a:br>
-                <a:r>
-                  <a:rPr lang="en-US" sz="1500" dirty="0"/>
-                  <a:t>-.52]</a:t>
-                </a:r>
-              </a:p>
-            </p:txBody>
-          </p:sp>
-          <p:sp>
-            <p:nvSpPr>
-              <p:cNvPr id="23" name="TextBox 22">
-                <a:extLst>
-                  <a:ext uri="{FF2B5EF4-FFF2-40B4-BE49-F238E27FC236}">
-                    <a16:creationId xmlns:a16="http://schemas.microsoft.com/office/drawing/2014/main" id="{56A9EE6B-51BB-1E56-0FB0-4E117C907BE6}"/>
-                  </a:ext>
-                </a:extLst>
-              </p:cNvPr>
-              <p:cNvSpPr txBox="1"/>
-              <p:nvPr/>
-            </p:nvSpPr>
-            <p:spPr>
-              <a:xfrm>
-                <a:off x="6096000" y="1120140"/>
-                <a:ext cx="777240" cy="1015663"/>
-              </a:xfrm>
-              <a:prstGeom prst="rect">
-                <a:avLst/>
-              </a:prstGeom>
-              <a:noFill/>
-            </p:spPr>
-            <p:txBody>
-              <a:bodyPr wrap="square" rtlCol="0">
-                <a:spAutoFit/>
-              </a:bodyPr>
-              <a:lstStyle/>
-              <a:p>
-                <a:r>
-                  <a:rPr lang="en-US" sz="1500" dirty="0"/>
-                  <a:t>[.12</a:t>
-                </a:r>
-                <a:br>
-                  <a:rPr lang="en-US" sz="1500" dirty="0"/>
-                </a:br>
-                <a:r>
-                  <a:rPr lang="en-US" sz="1500" dirty="0"/>
-                  <a:t>-.34</a:t>
-                </a:r>
-                <a:br>
-                  <a:rPr lang="en-US" sz="1500" dirty="0"/>
-                </a:br>
-                <a:r>
-                  <a:rPr lang="en-US" sz="1500" dirty="0"/>
-                  <a:t>.56</a:t>
-                </a:r>
-                <a:br>
-                  <a:rPr lang="en-US" sz="1500" dirty="0"/>
-                </a:br>
-                <a:r>
-                  <a:rPr lang="en-US" sz="1500" dirty="0"/>
-                  <a:t>-.78]</a:t>
-                </a:r>
-              </a:p>
-            </p:txBody>
-          </p:sp>
-          <p:sp>
-            <p:nvSpPr>
-              <p:cNvPr id="24" name="TextBox 23">
-                <a:extLst>
-                  <a:ext uri="{FF2B5EF4-FFF2-40B4-BE49-F238E27FC236}">
-                    <a16:creationId xmlns:a16="http://schemas.microsoft.com/office/drawing/2014/main" id="{12A3CDD0-7E42-24F0-E02B-1B27109F3FAC}"/>
-                  </a:ext>
-                </a:extLst>
-              </p:cNvPr>
-              <p:cNvSpPr txBox="1"/>
-              <p:nvPr/>
-            </p:nvSpPr>
-            <p:spPr>
-              <a:xfrm>
-                <a:off x="5105400" y="2247900"/>
-                <a:ext cx="777240" cy="1015663"/>
-              </a:xfrm>
-              <a:prstGeom prst="rect">
-                <a:avLst/>
-              </a:prstGeom>
-              <a:noFill/>
-            </p:spPr>
-            <p:txBody>
-              <a:bodyPr wrap="square" rtlCol="0">
-                <a:spAutoFit/>
-              </a:bodyPr>
-              <a:lstStyle/>
-              <a:p>
-                <a:r>
-                  <a:rPr lang="en-US" sz="1500" dirty="0"/>
-                  <a:t>[.98</a:t>
-                </a:r>
-                <a:br>
-                  <a:rPr lang="en-US" sz="1500" dirty="0"/>
-                </a:br>
-                <a:r>
-                  <a:rPr lang="en-US" sz="1500" dirty="0"/>
-                  <a:t>-.76</a:t>
-                </a:r>
-                <a:br>
-                  <a:rPr lang="en-US" sz="1500" dirty="0"/>
-                </a:br>
-                <a:r>
-                  <a:rPr lang="en-US" sz="1500" dirty="0"/>
-                  <a:t>.65</a:t>
-                </a:r>
-                <a:br>
-                  <a:rPr lang="en-US" sz="1500" dirty="0"/>
-                </a:br>
-                <a:r>
-                  <a:rPr lang="en-US" sz="1500" dirty="0"/>
-                  <a:t>-.43]</a:t>
-                </a:r>
-              </a:p>
-            </p:txBody>
-          </p:sp>
-          <p:sp>
-            <p:nvSpPr>
-              <p:cNvPr id="25" name="TextBox 24">
-                <a:extLst>
-                  <a:ext uri="{FF2B5EF4-FFF2-40B4-BE49-F238E27FC236}">
-                    <a16:creationId xmlns:a16="http://schemas.microsoft.com/office/drawing/2014/main" id="{09B815CD-2267-92A4-099B-2EEE7C99DE94}"/>
-                  </a:ext>
-                </a:extLst>
-              </p:cNvPr>
-              <p:cNvSpPr txBox="1"/>
-              <p:nvPr/>
-            </p:nvSpPr>
-            <p:spPr>
-              <a:xfrm>
-                <a:off x="6096000" y="2247900"/>
-                <a:ext cx="777240" cy="1015663"/>
-              </a:xfrm>
-              <a:prstGeom prst="rect">
-                <a:avLst/>
-              </a:prstGeom>
-              <a:noFill/>
-            </p:spPr>
-            <p:txBody>
-              <a:bodyPr wrap="square" rtlCol="0">
-                <a:spAutoFit/>
-              </a:bodyPr>
-              <a:lstStyle/>
-              <a:p>
-                <a:r>
-                  <a:rPr lang="en-US" sz="1500" dirty="0"/>
-                  <a:t>[.11</a:t>
-                </a:r>
-                <a:br>
-                  <a:rPr lang="en-US" sz="1500" dirty="0"/>
-                </a:br>
-                <a:r>
-                  <a:rPr lang="en-US" sz="1500" dirty="0"/>
-                  <a:t>-.22</a:t>
-                </a:r>
-                <a:br>
-                  <a:rPr lang="en-US" sz="1500" dirty="0"/>
-                </a:br>
-                <a:r>
-                  <a:rPr lang="en-US" sz="1500" dirty="0"/>
-                  <a:t>.33</a:t>
-                </a:r>
-                <a:br>
-                  <a:rPr lang="en-US" sz="1500" dirty="0"/>
-                </a:br>
-                <a:r>
-                  <a:rPr lang="en-US" sz="1500" dirty="0"/>
-                  <a:t>-.44]</a:t>
-                </a:r>
-              </a:p>
-            </p:txBody>
-          </p:sp>
-          <p:sp>
-            <p:nvSpPr>
-              <p:cNvPr id="26" name="Rectangle 25">
-                <a:extLst>
-                  <a:ext uri="{FF2B5EF4-FFF2-40B4-BE49-F238E27FC236}">
-                    <a16:creationId xmlns:a16="http://schemas.microsoft.com/office/drawing/2014/main" id="{24BBB5E9-35D6-2DC9-7E7E-79FC610C7E9D}"/>
-                  </a:ext>
-                </a:extLst>
-              </p:cNvPr>
-              <p:cNvSpPr/>
-              <p:nvPr/>
-            </p:nvSpPr>
-            <p:spPr>
-              <a:xfrm>
-                <a:off x="3593782" y="1039951"/>
-                <a:ext cx="870585" cy="2343329"/>
-              </a:xfrm>
-              <a:prstGeom prst="rect">
-                <a:avLst/>
-              </a:prstGeom>
-              <a:noFill/>
-            </p:spPr>
-            <p:style>
-              <a:lnRef idx="2">
-                <a:schemeClr val="accent1">
-                  <a:shade val="15000"/>
-                </a:schemeClr>
-              </a:lnRef>
-              <a:fillRef idx="1">
-                <a:schemeClr val="accent1"/>
-              </a:fillRef>
-              <a:effectRef idx="0">
-                <a:schemeClr val="accent1"/>
-              </a:effectRef>
-              <a:fontRef idx="minor">
-                <a:schemeClr val="lt1"/>
-              </a:fontRef>
-            </p:style>
-            <p:txBody>
-              <a:bodyPr rtlCol="0" anchor="ctr"/>
-              <a:lstStyle/>
-              <a:p>
-                <a:pPr algn="ctr"/>
-                <a:endParaRPr lang="en-US" sz="1500"/>
-              </a:p>
-            </p:txBody>
-          </p:sp>
-          <p:sp>
-            <p:nvSpPr>
-              <p:cNvPr id="27" name="Arrow: Right 26">
-                <a:extLst>
-                  <a:ext uri="{FF2B5EF4-FFF2-40B4-BE49-F238E27FC236}">
-                    <a16:creationId xmlns:a16="http://schemas.microsoft.com/office/drawing/2014/main" id="{D7A48D4D-3E8B-605C-578B-9D6778C89A0C}"/>
-                  </a:ext>
-                </a:extLst>
-              </p:cNvPr>
-              <p:cNvSpPr/>
-              <p:nvPr/>
-            </p:nvSpPr>
-            <p:spPr>
-              <a:xfrm>
-                <a:off x="3023146" y="2104072"/>
-                <a:ext cx="519202" cy="257175"/>
-              </a:xfrm>
-              <a:prstGeom prst="rightArrow">
-                <a:avLst/>
-              </a:prstGeom>
-              <a:noFill/>
-            </p:spPr>
-            <p:style>
-              <a:lnRef idx="2">
-                <a:schemeClr val="accent1">
-                  <a:shade val="15000"/>
-                </a:schemeClr>
-              </a:lnRef>
-              <a:fillRef idx="1">
-                <a:schemeClr val="accent1"/>
-              </a:fillRef>
-              <a:effectRef idx="0">
-                <a:schemeClr val="accent1"/>
-              </a:effectRef>
-              <a:fontRef idx="minor">
-                <a:schemeClr val="lt1"/>
-              </a:fontRef>
-            </p:style>
-            <p:txBody>
-              <a:bodyPr rtlCol="0" anchor="ctr"/>
-              <a:lstStyle/>
-              <a:p>
-                <a:pPr algn="ctr"/>
-                <a:endParaRPr lang="en-US" sz="1500"/>
-              </a:p>
-            </p:txBody>
-          </p:sp>
-          <p:sp>
-            <p:nvSpPr>
-              <p:cNvPr id="28" name="Arrow: Right 27">
-                <a:extLst>
-                  <a:ext uri="{FF2B5EF4-FFF2-40B4-BE49-F238E27FC236}">
-                    <a16:creationId xmlns:a16="http://schemas.microsoft.com/office/drawing/2014/main" id="{1B4A832B-8109-4D65-1C0A-46589E492AB8}"/>
-                  </a:ext>
-                </a:extLst>
-              </p:cNvPr>
-              <p:cNvSpPr/>
-              <p:nvPr/>
-            </p:nvSpPr>
-            <p:spPr>
-              <a:xfrm>
-                <a:off x="4554245" y="2083027"/>
-                <a:ext cx="519202" cy="257175"/>
-              </a:xfrm>
-              <a:prstGeom prst="rightArrow">
-                <a:avLst/>
-              </a:prstGeom>
-              <a:noFill/>
-            </p:spPr>
-            <p:style>
-              <a:lnRef idx="2">
-                <a:schemeClr val="accent1">
-                  <a:shade val="15000"/>
-                </a:schemeClr>
-              </a:lnRef>
-              <a:fillRef idx="1">
-                <a:schemeClr val="accent1"/>
-              </a:fillRef>
-              <a:effectRef idx="0">
-                <a:schemeClr val="accent1"/>
-              </a:effectRef>
-              <a:fontRef idx="minor">
-                <a:schemeClr val="lt1"/>
-              </a:fontRef>
-            </p:style>
-            <p:txBody>
-              <a:bodyPr rtlCol="0" anchor="ctr"/>
-              <a:lstStyle/>
-              <a:p>
-                <a:pPr algn="ctr"/>
-                <a:endParaRPr lang="en-US" sz="1500"/>
-              </a:p>
-            </p:txBody>
-          </p:sp>
-          <p:sp>
-            <p:nvSpPr>
-              <p:cNvPr id="29" name="TextBox 28">
-                <a:extLst>
-                  <a:ext uri="{FF2B5EF4-FFF2-40B4-BE49-F238E27FC236}">
-                    <a16:creationId xmlns:a16="http://schemas.microsoft.com/office/drawing/2014/main" id="{B41F2998-A305-DB34-A07E-E4CBBAA9491D}"/>
-                  </a:ext>
-                </a:extLst>
-              </p:cNvPr>
-              <p:cNvSpPr txBox="1"/>
-              <p:nvPr/>
-            </p:nvSpPr>
-            <p:spPr>
-              <a:xfrm>
-                <a:off x="3215552" y="205319"/>
-                <a:ext cx="1987956" cy="769453"/>
-              </a:xfrm>
-              <a:prstGeom prst="rect">
-                <a:avLst/>
-              </a:prstGeom>
-              <a:noFill/>
-            </p:spPr>
-            <p:txBody>
-              <a:bodyPr wrap="square" rtlCol="0">
-                <a:spAutoFit/>
-              </a:bodyPr>
-              <a:lstStyle/>
-              <a:p>
-                <a:r>
-                  <a:rPr lang="en-US" i="1" dirty="0"/>
-                  <a:t>Pre-trained Image encoder</a:t>
-                </a:r>
-              </a:p>
-            </p:txBody>
-          </p:sp>
-          <p:sp>
-            <p:nvSpPr>
-              <p:cNvPr id="30" name="Arrow: Right 29">
-                <a:extLst>
-                  <a:ext uri="{FF2B5EF4-FFF2-40B4-BE49-F238E27FC236}">
-                    <a16:creationId xmlns:a16="http://schemas.microsoft.com/office/drawing/2014/main" id="{3BB47D7B-D1FD-9780-98A9-5D5EBE83C8D9}"/>
-                  </a:ext>
-                </a:extLst>
-              </p:cNvPr>
-              <p:cNvSpPr/>
-              <p:nvPr/>
-            </p:nvSpPr>
-            <p:spPr>
-              <a:xfrm>
-                <a:off x="7172326" y="2073502"/>
-                <a:ext cx="519202" cy="257175"/>
-              </a:xfrm>
-              <a:prstGeom prst="rightArrow">
-                <a:avLst/>
-              </a:prstGeom>
-              <a:noFill/>
-            </p:spPr>
-            <p:style>
-              <a:lnRef idx="2">
-                <a:schemeClr val="accent1">
-                  <a:shade val="15000"/>
-                </a:schemeClr>
-              </a:lnRef>
-              <a:fillRef idx="1">
-                <a:schemeClr val="accent1"/>
-              </a:fillRef>
-              <a:effectRef idx="0">
-                <a:schemeClr val="accent1"/>
-              </a:effectRef>
-              <a:fontRef idx="minor">
-                <a:schemeClr val="lt1"/>
-              </a:fontRef>
-            </p:style>
-            <p:txBody>
-              <a:bodyPr rtlCol="0" anchor="ctr"/>
-              <a:lstStyle/>
-              <a:p>
-                <a:pPr algn="ctr"/>
-                <a:endParaRPr lang="en-US" sz="1500"/>
-              </a:p>
-            </p:txBody>
-          </p:sp>
-          <p:sp>
-            <p:nvSpPr>
-              <p:cNvPr id="31" name="TextBox 30">
-                <a:extLst>
-                  <a:ext uri="{FF2B5EF4-FFF2-40B4-BE49-F238E27FC236}">
-                    <a16:creationId xmlns:a16="http://schemas.microsoft.com/office/drawing/2014/main" id="{3B9AD9BF-0524-8FB5-B5C8-F7EC050BA2BF}"/>
-                  </a:ext>
-                </a:extLst>
-              </p:cNvPr>
-              <p:cNvSpPr txBox="1"/>
-              <p:nvPr/>
-            </p:nvSpPr>
-            <p:spPr>
-              <a:xfrm>
-                <a:off x="7172326" y="586085"/>
-                <a:ext cx="2412206" cy="769453"/>
-              </a:xfrm>
-              <a:prstGeom prst="rect">
-                <a:avLst/>
-              </a:prstGeom>
-              <a:noFill/>
-            </p:spPr>
-            <p:txBody>
-              <a:bodyPr wrap="square" rtlCol="0">
-                <a:spAutoFit/>
-              </a:bodyPr>
-              <a:lstStyle/>
-              <a:p>
-                <a:r>
-                  <a:rPr lang="en-US" i="1" dirty="0"/>
-                  <a:t>Linear projection layer</a:t>
-                </a:r>
-              </a:p>
-            </p:txBody>
-          </p:sp>
-          <p:sp>
-            <p:nvSpPr>
-              <p:cNvPr id="32" name="TextBox 31">
-                <a:extLst>
-                  <a:ext uri="{FF2B5EF4-FFF2-40B4-BE49-F238E27FC236}">
-                    <a16:creationId xmlns:a16="http://schemas.microsoft.com/office/drawing/2014/main" id="{2376850D-B5FD-C43A-C3F6-56260B051E49}"/>
-                  </a:ext>
-                </a:extLst>
-              </p:cNvPr>
-              <p:cNvSpPr txBox="1"/>
-              <p:nvPr/>
-            </p:nvSpPr>
-            <p:spPr>
-              <a:xfrm>
-                <a:off x="10465981" y="1409610"/>
-                <a:ext cx="777240" cy="553998"/>
-              </a:xfrm>
-              <a:prstGeom prst="rect">
-                <a:avLst/>
-              </a:prstGeom>
-              <a:noFill/>
-            </p:spPr>
-            <p:txBody>
-              <a:bodyPr wrap="square" rtlCol="0">
-                <a:spAutoFit/>
-              </a:bodyPr>
-              <a:lstStyle/>
-              <a:p>
-                <a:r>
-                  <a:rPr lang="en-US" sz="1500" dirty="0"/>
-                  <a:t>[.15</a:t>
-                </a:r>
-                <a:br>
-                  <a:rPr lang="en-US" sz="1500" dirty="0"/>
-                </a:br>
-                <a:r>
-                  <a:rPr lang="en-US" sz="1500" dirty="0"/>
-                  <a:t>-.61]</a:t>
-                </a:r>
-              </a:p>
-            </p:txBody>
-          </p:sp>
-          <p:sp>
-            <p:nvSpPr>
-              <p:cNvPr id="33" name="TextBox 32">
-                <a:extLst>
-                  <a:ext uri="{FF2B5EF4-FFF2-40B4-BE49-F238E27FC236}">
-                    <a16:creationId xmlns:a16="http://schemas.microsoft.com/office/drawing/2014/main" id="{6B2652FD-E839-4E27-FC74-2FB191E9C3FC}"/>
-                  </a:ext>
-                </a:extLst>
-              </p:cNvPr>
-              <p:cNvSpPr txBox="1"/>
-              <p:nvPr/>
-            </p:nvSpPr>
-            <p:spPr>
-              <a:xfrm>
-                <a:off x="10465981" y="2400241"/>
-                <a:ext cx="777240" cy="553998"/>
-              </a:xfrm>
-              <a:prstGeom prst="rect">
-                <a:avLst/>
-              </a:prstGeom>
-              <a:noFill/>
-            </p:spPr>
-            <p:txBody>
-              <a:bodyPr wrap="square" rtlCol="0">
-                <a:spAutoFit/>
-              </a:bodyPr>
-              <a:lstStyle/>
-              <a:p>
-                <a:r>
-                  <a:rPr lang="en-US" sz="1500" dirty="0"/>
-                  <a:t>[.12</a:t>
-                </a:r>
-                <a:br>
-                  <a:rPr lang="en-US" sz="1500" dirty="0"/>
-                </a:br>
-                <a:r>
-                  <a:rPr lang="en-US" sz="1500" dirty="0"/>
-                  <a:t>-.34]</a:t>
-                </a:r>
-              </a:p>
-            </p:txBody>
-          </p:sp>
-          <p:sp>
-            <p:nvSpPr>
-              <p:cNvPr id="34" name="TextBox 33">
-                <a:extLst>
-                  <a:ext uri="{FF2B5EF4-FFF2-40B4-BE49-F238E27FC236}">
-                    <a16:creationId xmlns:a16="http://schemas.microsoft.com/office/drawing/2014/main" id="{85961BF7-4417-59F9-543D-CA84F42D0E70}"/>
-                  </a:ext>
-                </a:extLst>
-              </p:cNvPr>
-              <p:cNvSpPr txBox="1"/>
-              <p:nvPr/>
-            </p:nvSpPr>
-            <p:spPr>
-              <a:xfrm>
-                <a:off x="9688741" y="1409610"/>
-                <a:ext cx="777240" cy="553998"/>
-              </a:xfrm>
-              <a:prstGeom prst="rect">
-                <a:avLst/>
-              </a:prstGeom>
-              <a:noFill/>
-            </p:spPr>
-            <p:txBody>
-              <a:bodyPr wrap="square" rtlCol="0">
-                <a:spAutoFit/>
-              </a:bodyPr>
-              <a:lstStyle/>
-              <a:p>
-                <a:r>
-                  <a:rPr lang="en-US" sz="1500" dirty="0"/>
-                  <a:t>[.98</a:t>
-                </a:r>
-                <a:br>
-                  <a:rPr lang="en-US" sz="1500" dirty="0"/>
-                </a:br>
-                <a:r>
-                  <a:rPr lang="en-US" sz="1500" dirty="0"/>
-                  <a:t>-.76]</a:t>
-                </a:r>
-              </a:p>
-            </p:txBody>
-          </p:sp>
-          <p:sp>
-            <p:nvSpPr>
-              <p:cNvPr id="35" name="TextBox 34">
-                <a:extLst>
-                  <a:ext uri="{FF2B5EF4-FFF2-40B4-BE49-F238E27FC236}">
-                    <a16:creationId xmlns:a16="http://schemas.microsoft.com/office/drawing/2014/main" id="{FCA63AE6-35F6-D439-23DF-40DDF8CB1506}"/>
-                  </a:ext>
-                </a:extLst>
-              </p:cNvPr>
-              <p:cNvSpPr txBox="1"/>
-              <p:nvPr/>
-            </p:nvSpPr>
-            <p:spPr>
-              <a:xfrm>
-                <a:off x="9688741" y="2369133"/>
-                <a:ext cx="777240" cy="553998"/>
-              </a:xfrm>
-              <a:prstGeom prst="rect">
-                <a:avLst/>
-              </a:prstGeom>
-              <a:noFill/>
-            </p:spPr>
-            <p:txBody>
-              <a:bodyPr wrap="square" rtlCol="0">
-                <a:spAutoFit/>
-              </a:bodyPr>
-              <a:lstStyle/>
-              <a:p>
-                <a:r>
-                  <a:rPr lang="en-US" sz="1500" dirty="0"/>
-                  <a:t>[.11</a:t>
-                </a:r>
-                <a:br>
-                  <a:rPr lang="en-US" sz="1500" dirty="0"/>
-                </a:br>
-                <a:r>
-                  <a:rPr lang="en-US" sz="1500" dirty="0"/>
-                  <a:t>-.22]</a:t>
-                </a:r>
-              </a:p>
-            </p:txBody>
-          </p:sp>
-          <p:sp>
-            <p:nvSpPr>
-              <p:cNvPr id="36" name="Rectangle 35">
-                <a:extLst>
-                  <a:ext uri="{FF2B5EF4-FFF2-40B4-BE49-F238E27FC236}">
-                    <a16:creationId xmlns:a16="http://schemas.microsoft.com/office/drawing/2014/main" id="{26905D20-222D-9798-2FBC-A3D65F566ECF}"/>
-                  </a:ext>
-                </a:extLst>
-              </p:cNvPr>
-              <p:cNvSpPr/>
-              <p:nvPr/>
-            </p:nvSpPr>
-            <p:spPr>
-              <a:xfrm>
-                <a:off x="8184357" y="1189582"/>
-                <a:ext cx="130016" cy="2343329"/>
-              </a:xfrm>
-              <a:prstGeom prst="rect">
-                <a:avLst/>
-              </a:prstGeom>
-              <a:noFill/>
-            </p:spPr>
-            <p:style>
-              <a:lnRef idx="2">
-                <a:schemeClr val="accent1">
-                  <a:shade val="15000"/>
-                </a:schemeClr>
-              </a:lnRef>
-              <a:fillRef idx="1">
-                <a:schemeClr val="accent1"/>
-              </a:fillRef>
-              <a:effectRef idx="0">
-                <a:schemeClr val="accent1"/>
-              </a:effectRef>
-              <a:fontRef idx="minor">
-                <a:schemeClr val="lt1"/>
-              </a:fontRef>
-            </p:style>
-            <p:txBody>
-              <a:bodyPr rtlCol="0" anchor="ctr"/>
-              <a:lstStyle/>
-              <a:p>
-                <a:pPr algn="ctr"/>
-                <a:endParaRPr lang="en-US" sz="1500"/>
-              </a:p>
-            </p:txBody>
-          </p:sp>
-          <p:sp>
-            <p:nvSpPr>
-              <p:cNvPr id="37" name="Arrow: Right 36">
-                <a:extLst>
-                  <a:ext uri="{FF2B5EF4-FFF2-40B4-BE49-F238E27FC236}">
-                    <a16:creationId xmlns:a16="http://schemas.microsoft.com/office/drawing/2014/main" id="{C9C23548-F8AF-D24D-382B-5825B01E1114}"/>
-                  </a:ext>
-                </a:extLst>
-              </p:cNvPr>
-              <p:cNvSpPr/>
-              <p:nvPr/>
-            </p:nvSpPr>
-            <p:spPr>
-              <a:xfrm>
-                <a:off x="8807202" y="2083027"/>
-                <a:ext cx="519202" cy="257175"/>
-              </a:xfrm>
-              <a:prstGeom prst="rightArrow">
-                <a:avLst/>
-              </a:prstGeom>
-              <a:noFill/>
-            </p:spPr>
-            <p:style>
-              <a:lnRef idx="2">
-                <a:schemeClr val="accent1">
-                  <a:shade val="15000"/>
-                </a:schemeClr>
-              </a:lnRef>
-              <a:fillRef idx="1">
-                <a:schemeClr val="accent1"/>
-              </a:fillRef>
-              <a:effectRef idx="0">
-                <a:schemeClr val="accent1"/>
-              </a:effectRef>
-              <a:fontRef idx="minor">
-                <a:schemeClr val="lt1"/>
-              </a:fontRef>
-            </p:style>
-            <p:txBody>
-              <a:bodyPr rtlCol="0" anchor="ctr"/>
-              <a:lstStyle/>
-              <a:p>
-                <a:pPr algn="ctr"/>
-                <a:endParaRPr lang="en-US" sz="1500"/>
-              </a:p>
-            </p:txBody>
-          </p:sp>
-          <p:sp>
-            <p:nvSpPr>
-              <p:cNvPr id="38" name="TextBox 37">
-                <a:extLst>
-                  <a:ext uri="{FF2B5EF4-FFF2-40B4-BE49-F238E27FC236}">
-                    <a16:creationId xmlns:a16="http://schemas.microsoft.com/office/drawing/2014/main" id="{68F38972-4A4E-AAED-DD2D-9399F2F4F03A}"/>
-                  </a:ext>
-                </a:extLst>
-              </p:cNvPr>
-              <p:cNvSpPr txBox="1"/>
-              <p:nvPr/>
-            </p:nvSpPr>
-            <p:spPr>
-              <a:xfrm>
-                <a:off x="9656832" y="601001"/>
-                <a:ext cx="2168933" cy="769453"/>
-              </a:xfrm>
-              <a:prstGeom prst="rect">
-                <a:avLst/>
-              </a:prstGeom>
-              <a:noFill/>
-            </p:spPr>
-            <p:txBody>
-              <a:bodyPr wrap="square" rtlCol="0">
-                <a:spAutoFit/>
-              </a:bodyPr>
-              <a:lstStyle/>
-              <a:p>
-                <a:r>
-                  <a:rPr lang="en-US" i="1" dirty="0"/>
-                  <a:t>Embeddings in LLM vocab space</a:t>
-                </a:r>
-              </a:p>
-            </p:txBody>
-          </p:sp>
-        </p:grpSp>
-        <p:grpSp>
-          <p:nvGrpSpPr>
-            <p:cNvPr id="53" name="Group 52">
-              <a:extLst>
-                <a:ext uri="{FF2B5EF4-FFF2-40B4-BE49-F238E27FC236}">
-                  <a16:creationId xmlns:a16="http://schemas.microsoft.com/office/drawing/2014/main" id="{26979866-8C7C-61E2-7ED3-2165E4005CAC}"/>
-                </a:ext>
-              </a:extLst>
-            </p:cNvPr>
-            <p:cNvGrpSpPr/>
-            <p:nvPr/>
-          </p:nvGrpSpPr>
-          <p:grpSpPr>
-            <a:xfrm>
-              <a:off x="465837" y="2826705"/>
-              <a:ext cx="11253638" cy="3647760"/>
-              <a:chOff x="465837" y="2826705"/>
-              <a:chExt cx="11253638" cy="3647760"/>
-            </a:xfrm>
-          </p:grpSpPr>
-          <p:sp>
-            <p:nvSpPr>
-              <p:cNvPr id="39" name="Arrow: Right 38">
-                <a:extLst>
-                  <a:ext uri="{FF2B5EF4-FFF2-40B4-BE49-F238E27FC236}">
-                    <a16:creationId xmlns:a16="http://schemas.microsoft.com/office/drawing/2014/main" id="{C9A742DD-4C54-AECF-8D32-86CC96A113ED}"/>
-                  </a:ext>
-                </a:extLst>
-              </p:cNvPr>
-              <p:cNvSpPr/>
-              <p:nvPr/>
-            </p:nvSpPr>
-            <p:spPr>
-              <a:xfrm>
-                <a:off x="10807281" y="2826705"/>
-                <a:ext cx="479447" cy="216024"/>
-              </a:xfrm>
-              <a:prstGeom prst="rightArrow">
-                <a:avLst/>
-              </a:prstGeom>
-              <a:noFill/>
-            </p:spPr>
-            <p:style>
-              <a:lnRef idx="2">
-                <a:schemeClr val="accent1">
-                  <a:shade val="15000"/>
-                </a:schemeClr>
-              </a:lnRef>
-              <a:fillRef idx="1">
-                <a:schemeClr val="accent1"/>
-              </a:fillRef>
-              <a:effectRef idx="0">
-                <a:schemeClr val="accent1"/>
-              </a:effectRef>
-              <a:fontRef idx="minor">
-                <a:schemeClr val="lt1"/>
-              </a:fontRef>
-            </p:style>
-            <p:txBody>
-              <a:bodyPr rtlCol="0" anchor="ctr"/>
-              <a:lstStyle/>
-              <a:p>
-                <a:pPr algn="ctr"/>
-                <a:endParaRPr lang="en-US" sz="1500"/>
-              </a:p>
-            </p:txBody>
-          </p:sp>
-          <p:sp>
-            <p:nvSpPr>
-              <p:cNvPr id="40" name="Arrow: Right 39">
-                <a:extLst>
-                  <a:ext uri="{FF2B5EF4-FFF2-40B4-BE49-F238E27FC236}">
-                    <a16:creationId xmlns:a16="http://schemas.microsoft.com/office/drawing/2014/main" id="{33567104-4E6F-4470-9ECE-FFD97720521F}"/>
-                  </a:ext>
-                </a:extLst>
-              </p:cNvPr>
-              <p:cNvSpPr/>
-              <p:nvPr/>
-            </p:nvSpPr>
-            <p:spPr>
-              <a:xfrm>
-                <a:off x="465837" y="5355847"/>
-                <a:ext cx="479447" cy="216024"/>
-              </a:xfrm>
-              <a:prstGeom prst="rightArrow">
-                <a:avLst/>
-              </a:prstGeom>
-              <a:noFill/>
-            </p:spPr>
-            <p:style>
-              <a:lnRef idx="2">
-                <a:schemeClr val="accent1">
-                  <a:shade val="15000"/>
-                </a:schemeClr>
-              </a:lnRef>
-              <a:fillRef idx="1">
-                <a:schemeClr val="accent1"/>
-              </a:fillRef>
-              <a:effectRef idx="0">
-                <a:schemeClr val="accent1"/>
-              </a:effectRef>
-              <a:fontRef idx="minor">
-                <a:schemeClr val="lt1"/>
-              </a:fontRef>
-            </p:style>
-            <p:txBody>
-              <a:bodyPr rtlCol="0" anchor="ctr"/>
-              <a:lstStyle/>
-              <a:p>
-                <a:pPr algn="ctr"/>
-                <a:endParaRPr lang="en-US" sz="1500"/>
-              </a:p>
-            </p:txBody>
-          </p:sp>
-          <p:sp>
-            <p:nvSpPr>
-              <p:cNvPr id="41" name="Rectangle 40">
-                <a:extLst>
-                  <a:ext uri="{FF2B5EF4-FFF2-40B4-BE49-F238E27FC236}">
-                    <a16:creationId xmlns:a16="http://schemas.microsoft.com/office/drawing/2014/main" id="{7FB49C21-BA36-F5D6-B545-3DD1C208C976}"/>
-                  </a:ext>
-                </a:extLst>
-              </p:cNvPr>
-              <p:cNvSpPr/>
-              <p:nvPr/>
-            </p:nvSpPr>
-            <p:spPr>
-              <a:xfrm>
-                <a:off x="5560828" y="4844403"/>
-                <a:ext cx="2775814" cy="1630062"/>
-              </a:xfrm>
-              <a:prstGeom prst="rect">
-                <a:avLst/>
-              </a:prstGeom>
-              <a:noFill/>
-            </p:spPr>
-            <p:style>
-              <a:lnRef idx="2">
-                <a:schemeClr val="accent1">
-                  <a:shade val="15000"/>
-                </a:schemeClr>
-              </a:lnRef>
-              <a:fillRef idx="1">
-                <a:schemeClr val="accent1"/>
-              </a:fillRef>
-              <a:effectRef idx="0">
-                <a:schemeClr val="accent1"/>
-              </a:effectRef>
-              <a:fontRef idx="minor">
-                <a:schemeClr val="lt1"/>
-              </a:fontRef>
-            </p:style>
-            <p:txBody>
-              <a:bodyPr rtlCol="0" anchor="ctr"/>
-              <a:lstStyle/>
-              <a:p>
-                <a:pPr algn="ctr"/>
-                <a:endParaRPr lang="en-US" sz="1500"/>
-              </a:p>
-            </p:txBody>
-          </p:sp>
-          <p:sp>
-            <p:nvSpPr>
-              <p:cNvPr id="42" name="TextBox 41">
-                <a:extLst>
-                  <a:ext uri="{FF2B5EF4-FFF2-40B4-BE49-F238E27FC236}">
-                    <a16:creationId xmlns:a16="http://schemas.microsoft.com/office/drawing/2014/main" id="{1D1F937C-0CCE-4F7D-947C-B22B921C06E4}"/>
-                  </a:ext>
-                </a:extLst>
-              </p:cNvPr>
-              <p:cNvSpPr txBox="1"/>
-              <p:nvPr/>
-            </p:nvSpPr>
-            <p:spPr>
-              <a:xfrm>
-                <a:off x="6035693" y="4326634"/>
-                <a:ext cx="2300949" cy="369332"/>
-              </a:xfrm>
-              <a:prstGeom prst="rect">
-                <a:avLst/>
-              </a:prstGeom>
-              <a:noFill/>
-            </p:spPr>
-            <p:txBody>
-              <a:bodyPr wrap="square" rtlCol="0">
-                <a:spAutoFit/>
-              </a:bodyPr>
-              <a:lstStyle/>
-              <a:p>
-                <a:r>
-                  <a:rPr lang="en-US" i="1" dirty="0"/>
-                  <a:t>Pre-trained LLM</a:t>
-                </a:r>
-              </a:p>
-            </p:txBody>
-          </p:sp>
-          <p:sp>
-            <p:nvSpPr>
-              <p:cNvPr id="43" name="Arrow: Right 42">
-                <a:extLst>
-                  <a:ext uri="{FF2B5EF4-FFF2-40B4-BE49-F238E27FC236}">
-                    <a16:creationId xmlns:a16="http://schemas.microsoft.com/office/drawing/2014/main" id="{1D28C986-608B-C5B0-6FBA-20D3270755E0}"/>
-                  </a:ext>
-                </a:extLst>
-              </p:cNvPr>
-              <p:cNvSpPr/>
-              <p:nvPr/>
-            </p:nvSpPr>
-            <p:spPr>
-              <a:xfrm>
-                <a:off x="8666337" y="5456078"/>
-                <a:ext cx="479447" cy="216024"/>
-              </a:xfrm>
-              <a:prstGeom prst="rightArrow">
-                <a:avLst/>
-              </a:prstGeom>
-              <a:noFill/>
-            </p:spPr>
-            <p:style>
-              <a:lnRef idx="2">
-                <a:schemeClr val="accent1">
-                  <a:shade val="15000"/>
-                </a:schemeClr>
-              </a:lnRef>
-              <a:fillRef idx="1">
-                <a:schemeClr val="accent1"/>
-              </a:fillRef>
-              <a:effectRef idx="0">
-                <a:schemeClr val="accent1"/>
-              </a:effectRef>
-              <a:fontRef idx="minor">
-                <a:schemeClr val="lt1"/>
-              </a:fontRef>
-            </p:style>
-            <p:txBody>
-              <a:bodyPr rtlCol="0" anchor="ctr"/>
-              <a:lstStyle/>
-              <a:p>
-                <a:pPr algn="ctr"/>
-                <a:endParaRPr lang="en-US" sz="1500"/>
-              </a:p>
-            </p:txBody>
-          </p:sp>
-          <p:sp>
-            <p:nvSpPr>
-              <p:cNvPr id="44" name="TextBox 43">
-                <a:extLst>
-                  <a:ext uri="{FF2B5EF4-FFF2-40B4-BE49-F238E27FC236}">
-                    <a16:creationId xmlns:a16="http://schemas.microsoft.com/office/drawing/2014/main" id="{3071874A-86E5-59A9-19C7-F260A3591A40}"/>
-                  </a:ext>
-                </a:extLst>
-              </p:cNvPr>
-              <p:cNvSpPr txBox="1"/>
-              <p:nvPr/>
-            </p:nvSpPr>
-            <p:spPr>
-              <a:xfrm>
-                <a:off x="9418526" y="5343432"/>
-                <a:ext cx="2300949" cy="369332"/>
-              </a:xfrm>
-              <a:prstGeom prst="rect">
-                <a:avLst/>
-              </a:prstGeom>
-              <a:noFill/>
-            </p:spPr>
-            <p:txBody>
-              <a:bodyPr wrap="square" rtlCol="0">
-                <a:spAutoFit/>
-              </a:bodyPr>
-              <a:lstStyle/>
-              <a:p>
-                <a:r>
-                  <a:rPr lang="en-US" dirty="0"/>
-                  <a:t>Image Caption</a:t>
-                </a:r>
-              </a:p>
-            </p:txBody>
-          </p:sp>
-          <p:sp>
-            <p:nvSpPr>
-              <p:cNvPr id="46" name="TextBox 45">
-                <a:extLst>
-                  <a:ext uri="{FF2B5EF4-FFF2-40B4-BE49-F238E27FC236}">
-                    <a16:creationId xmlns:a16="http://schemas.microsoft.com/office/drawing/2014/main" id="{8AB184EC-FD5F-6FF7-7280-61EEEBFD9FB6}"/>
-                  </a:ext>
-                </a:extLst>
-              </p:cNvPr>
-              <p:cNvSpPr txBox="1"/>
-              <p:nvPr/>
-            </p:nvSpPr>
-            <p:spPr>
-              <a:xfrm>
-                <a:off x="1834454" y="4934762"/>
-                <a:ext cx="717727" cy="465352"/>
-              </a:xfrm>
-              <a:prstGeom prst="rect">
-                <a:avLst/>
-              </a:prstGeom>
-              <a:noFill/>
-            </p:spPr>
-            <p:txBody>
-              <a:bodyPr wrap="square" rtlCol="0">
-                <a:spAutoFit/>
-              </a:bodyPr>
-              <a:lstStyle/>
-              <a:p>
-                <a:r>
-                  <a:rPr lang="en-US" sz="1500" dirty="0"/>
-                  <a:t>[.15</a:t>
-                </a:r>
-                <a:br>
-                  <a:rPr lang="en-US" sz="1500" dirty="0"/>
-                </a:br>
-                <a:r>
-                  <a:rPr lang="en-US" sz="1500" dirty="0"/>
-                  <a:t>-.61]</a:t>
-                </a:r>
-              </a:p>
-            </p:txBody>
-          </p:sp>
-          <p:sp>
-            <p:nvSpPr>
-              <p:cNvPr id="47" name="TextBox 46">
-                <a:extLst>
-                  <a:ext uri="{FF2B5EF4-FFF2-40B4-BE49-F238E27FC236}">
-                    <a16:creationId xmlns:a16="http://schemas.microsoft.com/office/drawing/2014/main" id="{4D88E4E4-BC19-57BB-4727-DFDB97A2CB47}"/>
-                  </a:ext>
-                </a:extLst>
-              </p:cNvPr>
-              <p:cNvSpPr txBox="1"/>
-              <p:nvPr/>
-            </p:nvSpPr>
-            <p:spPr>
-              <a:xfrm>
-                <a:off x="1834454" y="5766880"/>
-                <a:ext cx="717727" cy="465352"/>
-              </a:xfrm>
-              <a:prstGeom prst="rect">
-                <a:avLst/>
-              </a:prstGeom>
-              <a:noFill/>
-            </p:spPr>
-            <p:txBody>
-              <a:bodyPr wrap="square" rtlCol="0">
-                <a:spAutoFit/>
-              </a:bodyPr>
-              <a:lstStyle/>
-              <a:p>
-                <a:r>
-                  <a:rPr lang="en-US" sz="1500" dirty="0"/>
-                  <a:t>[.12</a:t>
-                </a:r>
-                <a:br>
-                  <a:rPr lang="en-US" sz="1500" dirty="0"/>
-                </a:br>
-                <a:r>
-                  <a:rPr lang="en-US" sz="1500" dirty="0"/>
-                  <a:t>-.34]</a:t>
-                </a:r>
-              </a:p>
-            </p:txBody>
-          </p:sp>
-          <p:sp>
-            <p:nvSpPr>
-              <p:cNvPr id="48" name="TextBox 47">
-                <a:extLst>
-                  <a:ext uri="{FF2B5EF4-FFF2-40B4-BE49-F238E27FC236}">
-                    <a16:creationId xmlns:a16="http://schemas.microsoft.com/office/drawing/2014/main" id="{CD025D92-113D-AC8D-572E-DD82DFCDDB0D}"/>
-                  </a:ext>
-                </a:extLst>
-              </p:cNvPr>
-              <p:cNvSpPr txBox="1"/>
-              <p:nvPr/>
-            </p:nvSpPr>
-            <p:spPr>
-              <a:xfrm>
-                <a:off x="1116727" y="4934762"/>
-                <a:ext cx="717727" cy="465352"/>
-              </a:xfrm>
-              <a:prstGeom prst="rect">
-                <a:avLst/>
-              </a:prstGeom>
-              <a:noFill/>
-            </p:spPr>
-            <p:txBody>
-              <a:bodyPr wrap="square" rtlCol="0">
-                <a:spAutoFit/>
-              </a:bodyPr>
-              <a:lstStyle/>
-              <a:p>
-                <a:r>
-                  <a:rPr lang="en-US" sz="1500" dirty="0"/>
-                  <a:t>[.98</a:t>
-                </a:r>
-                <a:br>
-                  <a:rPr lang="en-US" sz="1500" dirty="0"/>
-                </a:br>
-                <a:r>
-                  <a:rPr lang="en-US" sz="1500" dirty="0"/>
-                  <a:t>-.76]</a:t>
-                </a:r>
-              </a:p>
-            </p:txBody>
-          </p:sp>
-          <p:sp>
-            <p:nvSpPr>
-              <p:cNvPr id="49" name="TextBox 48">
-                <a:extLst>
-                  <a:ext uri="{FF2B5EF4-FFF2-40B4-BE49-F238E27FC236}">
-                    <a16:creationId xmlns:a16="http://schemas.microsoft.com/office/drawing/2014/main" id="{76984A72-8270-6489-9993-F76303D96051}"/>
-                  </a:ext>
-                </a:extLst>
-              </p:cNvPr>
-              <p:cNvSpPr txBox="1"/>
-              <p:nvPr/>
-            </p:nvSpPr>
-            <p:spPr>
-              <a:xfrm>
-                <a:off x="1116727" y="5740750"/>
-                <a:ext cx="717727" cy="465352"/>
-              </a:xfrm>
-              <a:prstGeom prst="rect">
-                <a:avLst/>
-              </a:prstGeom>
-              <a:noFill/>
-            </p:spPr>
-            <p:txBody>
-              <a:bodyPr wrap="square" rtlCol="0">
-                <a:spAutoFit/>
-              </a:bodyPr>
-              <a:lstStyle/>
-              <a:p>
-                <a:r>
-                  <a:rPr lang="en-US" sz="1500" dirty="0"/>
-                  <a:t>[.11</a:t>
-                </a:r>
-                <a:br>
-                  <a:rPr lang="en-US" sz="1500" dirty="0"/>
-                </a:br>
-                <a:r>
-                  <a:rPr lang="en-US" sz="1500" dirty="0"/>
-                  <a:t>-.22]</a:t>
-                </a:r>
-              </a:p>
-            </p:txBody>
-          </p:sp>
-          <p:sp>
-            <p:nvSpPr>
-              <p:cNvPr id="50" name="TextBox 49">
-                <a:extLst>
-                  <a:ext uri="{FF2B5EF4-FFF2-40B4-BE49-F238E27FC236}">
-                    <a16:creationId xmlns:a16="http://schemas.microsoft.com/office/drawing/2014/main" id="{2A4F8412-0230-E266-F288-0721DD313423}"/>
-                  </a:ext>
-                </a:extLst>
-              </p:cNvPr>
-              <p:cNvSpPr txBox="1"/>
-              <p:nvPr/>
-            </p:nvSpPr>
-            <p:spPr>
-              <a:xfrm>
-                <a:off x="2483590" y="5333767"/>
-                <a:ext cx="2300949" cy="369332"/>
-              </a:xfrm>
-              <a:prstGeom prst="rect">
-                <a:avLst/>
-              </a:prstGeom>
-              <a:noFill/>
-            </p:spPr>
-            <p:txBody>
-              <a:bodyPr wrap="square" rtlCol="0">
-                <a:spAutoFit/>
-              </a:bodyPr>
-              <a:lstStyle/>
-              <a:p>
-                <a:r>
-                  <a:rPr lang="en-US" dirty="0"/>
-                  <a:t>“Describe the image”</a:t>
-                </a:r>
-              </a:p>
-            </p:txBody>
-          </p:sp>
-          <p:sp>
-            <p:nvSpPr>
-              <p:cNvPr id="51" name="TextBox 50">
-                <a:extLst>
-                  <a:ext uri="{FF2B5EF4-FFF2-40B4-BE49-F238E27FC236}">
-                    <a16:creationId xmlns:a16="http://schemas.microsoft.com/office/drawing/2014/main" id="{ECB91730-FDD3-B82D-4EE1-DE17BA10888E}"/>
-                  </a:ext>
-                </a:extLst>
-              </p:cNvPr>
-              <p:cNvSpPr txBox="1"/>
-              <p:nvPr/>
-            </p:nvSpPr>
-            <p:spPr>
-              <a:xfrm>
-                <a:off x="2690798" y="4409090"/>
-                <a:ext cx="2300949" cy="369332"/>
-              </a:xfrm>
-              <a:prstGeom prst="rect">
-                <a:avLst/>
-              </a:prstGeom>
-              <a:noFill/>
-            </p:spPr>
-            <p:txBody>
-              <a:bodyPr wrap="square" rtlCol="0">
-                <a:spAutoFit/>
-              </a:bodyPr>
-              <a:lstStyle/>
-              <a:p>
-                <a:r>
-                  <a:rPr lang="en-US" i="1" dirty="0"/>
-                  <a:t>Append prompt</a:t>
-                </a:r>
-              </a:p>
-            </p:txBody>
-          </p:sp>
-          <p:sp>
-            <p:nvSpPr>
-              <p:cNvPr id="52" name="Arrow: Right 51">
-                <a:extLst>
-                  <a:ext uri="{FF2B5EF4-FFF2-40B4-BE49-F238E27FC236}">
-                    <a16:creationId xmlns:a16="http://schemas.microsoft.com/office/drawing/2014/main" id="{DB7D6276-598C-0A51-F472-76EE8A1763CC}"/>
-                  </a:ext>
-                </a:extLst>
-              </p:cNvPr>
-              <p:cNvSpPr/>
-              <p:nvPr/>
-            </p:nvSpPr>
-            <p:spPr>
-              <a:xfrm>
-                <a:off x="4817557" y="5439218"/>
-                <a:ext cx="479447" cy="216024"/>
-              </a:xfrm>
-              <a:prstGeom prst="rightArrow">
-                <a:avLst/>
-              </a:prstGeom>
-              <a:noFill/>
-            </p:spPr>
-            <p:style>
-              <a:lnRef idx="2">
-                <a:schemeClr val="accent1">
-                  <a:shade val="15000"/>
-                </a:schemeClr>
-              </a:lnRef>
-              <a:fillRef idx="1">
-                <a:schemeClr val="accent1"/>
-              </a:fillRef>
-              <a:effectRef idx="0">
-                <a:schemeClr val="accent1"/>
-              </a:effectRef>
-              <a:fontRef idx="minor">
-                <a:schemeClr val="lt1"/>
-              </a:fontRef>
-            </p:style>
-            <p:txBody>
-              <a:bodyPr rtlCol="0" anchor="ctr"/>
-              <a:lstStyle/>
-              <a:p>
-                <a:pPr algn="ctr"/>
-                <a:endParaRPr lang="en-US" sz="1500"/>
-              </a:p>
-            </p:txBody>
-          </p:sp>
-        </p:grpSp>
-      </p:grpSp>
-    </p:spTree>
-    <p:extLst>
-      <p:ext uri="{BB962C8B-B14F-4D97-AF65-F5344CB8AC3E}">
-        <p14:creationId xmlns:p14="http://schemas.microsoft.com/office/powerpoint/2010/main" val="968770326"/>
-      </p:ext>
-    </p:extLst>
-  </p:cSld>
-  <p:clrMapOvr>
-    <a:masterClrMapping/>
-  </p:clrMapOvr>
-</p:sld>
-</file>
-
-<file path=ppt/slides/slide22.xml><?xml version="1.0" encoding="utf-8"?>
+<file path=ppt/slides/slide3.xml><?xml version="1.0" encoding="utf-8"?>
 <p:sld xmlns:a="http://schemas.openxmlformats.org/drawingml/2006/main" xmlns:r="http://schemas.openxmlformats.org/officeDocument/2006/relationships" xmlns:p="http://schemas.openxmlformats.org/presentationml/2006/main">
   <p:cSld>
     <p:spTree>
@@ -11479,40 +9887,123 @@
           <a:chExt cx="0" cy="0"/>
         </a:xfrm>
       </p:grpSpPr>
-      <p:pic>
-        <p:nvPicPr>
-          <p:cNvPr id="5" name="Picture 4">
+      <p:grpSp>
+        <p:nvGrpSpPr>
+          <p:cNvPr id="5" name="Group 4">
             <a:extLst>
               <a:ext uri="{FF2B5EF4-FFF2-40B4-BE49-F238E27FC236}">
-                <a16:creationId xmlns:a16="http://schemas.microsoft.com/office/drawing/2014/main" id="{5F5C9B50-38F3-2CD9-1CEC-F220496B6318}"/>
+                <a16:creationId xmlns:a16="http://schemas.microsoft.com/office/drawing/2014/main" id="{07260B66-FEBD-B19C-C0C2-1BF57D551051}"/>
               </a:ext>
             </a:extLst>
           </p:cNvPr>
-          <p:cNvPicPr>
-            <a:picLocks noChangeAspect="1"/>
-          </p:cNvPicPr>
-          <p:nvPr/>
-        </p:nvPicPr>
-        <p:blipFill>
-          <a:blip r:embed="rId2"/>
-          <a:stretch>
-            <a:fillRect/>
-          </a:stretch>
-        </p:blipFill>
-        <p:spPr>
-          <a:xfrm>
-            <a:off x="528734" y="1214437"/>
-            <a:ext cx="10070841" cy="4429125"/>
-          </a:xfrm>
-          <a:prstGeom prst="rect">
-            <a:avLst/>
-          </a:prstGeom>
-        </p:spPr>
-      </p:pic>
+          <p:cNvGrpSpPr/>
+          <p:nvPr/>
+        </p:nvGrpSpPr>
+        <p:grpSpPr>
+          <a:xfrm>
+            <a:off x="1716505" y="876222"/>
+            <a:ext cx="8758989" cy="4841841"/>
+            <a:chOff x="1716505" y="876222"/>
+            <a:chExt cx="8758989" cy="4841841"/>
+          </a:xfrm>
+        </p:grpSpPr>
+        <p:pic>
+          <p:nvPicPr>
+            <p:cNvPr id="3" name="Picture 2">
+              <a:extLst>
+                <a:ext uri="{FF2B5EF4-FFF2-40B4-BE49-F238E27FC236}">
+                  <a16:creationId xmlns:a16="http://schemas.microsoft.com/office/drawing/2014/main" id="{97E10816-E58C-0D4C-C54E-A3B1B1F7601E}"/>
+                </a:ext>
+              </a:extLst>
+            </p:cNvPr>
+            <p:cNvPicPr>
+              <a:picLocks noChangeAspect="1"/>
+            </p:cNvPicPr>
+            <p:nvPr/>
+          </p:nvPicPr>
+          <p:blipFill>
+            <a:blip r:embed="rId2"/>
+            <a:stretch>
+              <a:fillRect/>
+            </a:stretch>
+          </p:blipFill>
+          <p:spPr>
+            <a:xfrm>
+              <a:off x="1716505" y="1576489"/>
+              <a:ext cx="8758989" cy="4141574"/>
+            </a:xfrm>
+            <a:prstGeom prst="rect">
+              <a:avLst/>
+            </a:prstGeom>
+          </p:spPr>
+        </p:pic>
+        <p:sp>
+          <p:nvSpPr>
+            <p:cNvPr id="4" name="Text 4">
+              <a:extLst>
+                <a:ext uri="{FF2B5EF4-FFF2-40B4-BE49-F238E27FC236}">
+                  <a16:creationId xmlns:a16="http://schemas.microsoft.com/office/drawing/2014/main" id="{A0D1DDFC-B853-573C-5643-72D08B10E47E}"/>
+                </a:ext>
+              </a:extLst>
+            </p:cNvPr>
+            <p:cNvSpPr/>
+            <p:nvPr/>
+          </p:nvSpPr>
+          <p:spPr>
+            <a:xfrm>
+              <a:off x="2991661" y="876222"/>
+              <a:ext cx="5578728" cy="700267"/>
+            </a:xfrm>
+            <a:prstGeom prst="rect">
+              <a:avLst/>
+            </a:prstGeom>
+            <a:noFill/>
+            <a:ln/>
+          </p:spPr>
+          <p:txBody>
+            <a:bodyPr wrap="square" lIns="0" tIns="0" rIns="0" bIns="0" rtlCol="0" anchor="ctr"/>
+            <a:lstStyle/>
+            <a:p>
+              <a:pPr algn="ctr"/>
+              <a:r>
+                <a:rPr lang="en-US" sz="2400" b="1" dirty="0">
+                  <a:solidFill>
+                    <a:srgbClr val="1A1A1A"/>
+                  </a:solidFill>
+                  <a:ea typeface="Calibri" pitchFamily="34" charset="-122"/>
+                  <a:cs typeface="Calibri" pitchFamily="34" charset="-120"/>
+                </a:rPr>
+                <a:t>Nano-</a:t>
+              </a:r>
+              <a:r>
+                <a:rPr lang="en-US" sz="2400" b="1" dirty="0" err="1">
+                  <a:solidFill>
+                    <a:srgbClr val="1A1A1A"/>
+                  </a:solidFill>
+                  <a:ea typeface="Calibri" pitchFamily="34" charset="-122"/>
+                  <a:cs typeface="Calibri" pitchFamily="34" charset="-120"/>
+                </a:rPr>
+                <a:t>LLaVa</a:t>
+              </a:r>
+              <a:r>
+                <a:rPr lang="en-US" sz="2400" b="1" dirty="0">
+                  <a:solidFill>
+                    <a:srgbClr val="1A1A1A"/>
+                  </a:solidFill>
+                  <a:ea typeface="Calibri" pitchFamily="34" charset="-122"/>
+                  <a:cs typeface="Calibri" pitchFamily="34" charset="-120"/>
+                </a:rPr>
+                <a:t> Architecture</a:t>
+              </a:r>
+              <a:endParaRPr lang="en-US" sz="2400" dirty="0"/>
+            </a:p>
+          </p:txBody>
+        </p:sp>
+      </p:grpSp>
     </p:spTree>
     <p:extLst>
       <p:ext uri="{BB962C8B-B14F-4D97-AF65-F5344CB8AC3E}">
-        <p14:creationId xmlns:p14="http://schemas.microsoft.com/office/powerpoint/2010/main" val="1817693217"/>
+        <p14:creationId xmlns:p14="http://schemas.microsoft.com/office/powerpoint/2010/main" val="879371360"/>
       </p:ext>
     </p:extLst>
   </p:cSld>
@@ -11522,7 +10013,7 @@
 </p:sld>
 </file>
 
-<file path=ppt/slides/slide3.xml><?xml version="1.0" encoding="utf-8"?>
+<file path=ppt/slides/slide4.xml><?xml version="1.0" encoding="utf-8"?>
 <p:sld xmlns:a="http://schemas.openxmlformats.org/drawingml/2006/main" xmlns:r="http://schemas.openxmlformats.org/officeDocument/2006/relationships" xmlns:p="http://schemas.openxmlformats.org/presentationml/2006/main">
   <p:cSld name="Slide 3">
     <p:bg>
@@ -12498,7 +10989,7 @@
 </p:sld>
 </file>
 
-<file path=ppt/slides/slide4.xml><?xml version="1.0" encoding="utf-8"?>
+<file path=ppt/slides/slide5.xml><?xml version="1.0" encoding="utf-8"?>
 <p:sld xmlns:a="http://schemas.openxmlformats.org/drawingml/2006/main" xmlns:r="http://schemas.openxmlformats.org/officeDocument/2006/relationships" xmlns:p="http://schemas.openxmlformats.org/presentationml/2006/main">
   <p:cSld name="Slide 4">
     <p:bg>
@@ -13039,7 +11530,7 @@
 </p:sld>
 </file>
 
-<file path=ppt/slides/slide5.xml><?xml version="1.0" encoding="utf-8"?>
+<file path=ppt/slides/slide6.xml><?xml version="1.0" encoding="utf-8"?>
 <p:sld xmlns:a="http://schemas.openxmlformats.org/drawingml/2006/main" xmlns:r="http://schemas.openxmlformats.org/officeDocument/2006/relationships" xmlns:p="http://schemas.openxmlformats.org/presentationml/2006/main">
   <p:cSld name="Slide 5">
     <p:bg>
@@ -13703,7 +12194,7 @@
 </p:sld>
 </file>
 
-<file path=ppt/slides/slide6.xml><?xml version="1.0" encoding="utf-8"?>
+<file path=ppt/slides/slide7.xml><?xml version="1.0" encoding="utf-8"?>
 <p:sld xmlns:a="http://schemas.openxmlformats.org/drawingml/2006/main" xmlns:r="http://schemas.openxmlformats.org/officeDocument/2006/relationships" xmlns:p="http://schemas.openxmlformats.org/presentationml/2006/main">
   <p:cSld name="Slide 6">
     <p:bg>
@@ -13805,7 +12296,7 @@
         </p:nvSpPr>
         <p:spPr>
           <a:xfrm>
-            <a:off x="457200" y="2286000"/>
+            <a:off x="7864998" y="2376839"/>
             <a:ext cx="3584448" cy="1463040"/>
           </a:xfrm>
           <a:prstGeom prst="rect">
@@ -13842,7 +12333,7 @@
         </p:nvSpPr>
         <p:spPr>
           <a:xfrm>
-            <a:off x="457200" y="3840480"/>
+            <a:off x="7864998" y="3931319"/>
             <a:ext cx="3584448" cy="365760"/>
           </a:xfrm>
           <a:prstGeom prst="rect">
@@ -13903,7 +12394,7 @@
         </p:nvSpPr>
         <p:spPr>
           <a:xfrm>
-            <a:off x="457200" y="4251960"/>
+            <a:off x="7864998" y="4342799"/>
             <a:ext cx="3584448" cy="365760"/>
           </a:xfrm>
           <a:prstGeom prst="rect">
@@ -13942,7 +12433,7 @@
         </p:nvSpPr>
         <p:spPr>
           <a:xfrm>
-            <a:off x="4315968" y="2286000"/>
+            <a:off x="299553" y="2240280"/>
             <a:ext cx="3584448" cy="1463040"/>
           </a:xfrm>
           <a:prstGeom prst="rect">
@@ -13965,7 +12456,7 @@
                 <a:ea typeface="Calibri" pitchFamily="34" charset="-122"/>
                 <a:cs typeface="Calibri" pitchFamily="34" charset="-120"/>
               </a:rPr>
-              <a:t>81.99%</a:t>
+              <a:t>82.68%</a:t>
             </a:r>
             <a:endParaRPr lang="en-US" sz="6400" dirty="0"/>
           </a:p>
@@ -13979,7 +12470,7 @@
         </p:nvSpPr>
         <p:spPr>
           <a:xfrm>
-            <a:off x="4315968" y="3840480"/>
+            <a:off x="299553" y="3794760"/>
             <a:ext cx="3584448" cy="365760"/>
           </a:xfrm>
           <a:prstGeom prst="rect">
@@ -14004,7 +12495,7 @@
                 <a:ea typeface="Calibri" pitchFamily="34" charset="-122"/>
                 <a:cs typeface="Calibri" pitchFamily="34" charset="-120"/>
               </a:rPr>
-              <a:t>increase in GPU utilization</a:t>
+              <a:t>increase in est. SM utilization</a:t>
             </a:r>
             <a:endParaRPr lang="en-US" sz="1600" dirty="0"/>
           </a:p>
@@ -14018,7 +12509,7 @@
         </p:nvSpPr>
         <p:spPr>
           <a:xfrm>
-            <a:off x="4315968" y="4251960"/>
+            <a:off x="299553" y="4206240"/>
             <a:ext cx="3584448" cy="608798"/>
           </a:xfrm>
           <a:prstGeom prst="rect">
@@ -14088,7 +12579,7 @@
         </p:nvSpPr>
         <p:spPr>
           <a:xfrm>
-            <a:off x="8174736" y="2286000"/>
+            <a:off x="4151376" y="2224639"/>
             <a:ext cx="3584448" cy="1463040"/>
           </a:xfrm>
           <a:prstGeom prst="rect">
@@ -14113,7 +12604,7 @@
                 <a:ea typeface="Calibri" pitchFamily="34" charset="-122"/>
                 <a:cs typeface="Calibri" pitchFamily="34" charset="-120"/>
               </a:rPr>
-              <a:t>6.15x</a:t>
+              <a:t>8.77x</a:t>
             </a:r>
             <a:endParaRPr lang="en-US" sz="6400" dirty="0"/>
           </a:p>
@@ -14127,7 +12618,7 @@
         </p:nvSpPr>
         <p:spPr>
           <a:xfrm>
-            <a:off x="8174736" y="3840480"/>
+            <a:off x="4151376" y="3779119"/>
             <a:ext cx="3584448" cy="365760"/>
           </a:xfrm>
           <a:prstGeom prst="rect">
@@ -14250,7 +12741,7 @@
         </p:nvSpPr>
         <p:spPr>
           <a:xfrm>
-            <a:off x="8174736" y="4297680"/>
+            <a:off x="4151376" y="4236319"/>
             <a:ext cx="3584448" cy="608798"/>
           </a:xfrm>
           <a:prstGeom prst="rect">
@@ -14312,7 +12803,7 @@
 </p:sld>
 </file>
 
-<file path=ppt/slides/slide7.xml><?xml version="1.0" encoding="utf-8"?>
+<file path=ppt/slides/slide8.xml><?xml version="1.0" encoding="utf-8"?>
 <p:sld xmlns:a="http://schemas.openxmlformats.org/drawingml/2006/main" xmlns:r="http://schemas.openxmlformats.org/officeDocument/2006/relationships" xmlns:p="http://schemas.openxmlformats.org/presentationml/2006/main">
   <p:cSld>
     <p:bg>
@@ -14732,12 +13223,137 @@
           </a:p>
         </p:txBody>
       </p:sp>
+      <p:sp>
+        <p:nvSpPr>
+          <p:cNvPr id="10" name="Text 4">
+            <a:extLst>
+              <a:ext uri="{FF2B5EF4-FFF2-40B4-BE49-F238E27FC236}">
+                <a16:creationId xmlns:a16="http://schemas.microsoft.com/office/drawing/2014/main" id="{51BA8BB3-A67F-5CBD-1D7F-2F6297607A73}"/>
+              </a:ext>
+            </a:extLst>
+          </p:cNvPr>
+          <p:cNvSpPr/>
+          <p:nvPr/>
+        </p:nvSpPr>
+        <p:spPr>
+          <a:xfrm>
+            <a:off x="220049" y="6053887"/>
+            <a:ext cx="5225971" cy="700267"/>
+          </a:xfrm>
+          <a:prstGeom prst="rect">
+            <a:avLst/>
+          </a:prstGeom>
+          <a:noFill/>
+          <a:ln/>
+        </p:spPr>
+        <p:txBody>
+          <a:bodyPr wrap="square" lIns="0" tIns="0" rIns="0" bIns="0" rtlCol="0" anchor="ctr"/>
+          <a:lstStyle/>
+          <a:p>
+            <a:pPr algn="ctr"/>
+            <a:r>
+              <a:rPr lang="en-US" sz="1400" b="1" dirty="0">
+                <a:solidFill>
+                  <a:srgbClr val="1A1A1A"/>
+                </a:solidFill>
+                <a:ea typeface="Calibri" pitchFamily="34" charset="-122"/>
+                <a:cs typeface="Calibri" pitchFamily="34" charset="-120"/>
+              </a:rPr>
+              <a:t>Baseline: </a:t>
+            </a:r>
+            <a:r>
+              <a:rPr lang="en-US" sz="1400" dirty="0"/>
+              <a:t>baseline_online_w0_persistFalse_pinFalse</a:t>
+            </a:r>
+          </a:p>
+          <a:p>
+            <a:pPr algn="ctr"/>
+            <a:r>
+              <a:rPr lang="en-US" sz="1400" b="1" dirty="0"/>
+              <a:t>Optimized: </a:t>
+            </a:r>
+            <a:r>
+              <a:rPr lang="en-US" sz="1400" dirty="0" err="1"/>
+              <a:t>optimized_offline_pinTrue</a:t>
+            </a:r>
+            <a:endParaRPr lang="en-US" sz="1400" b="1" dirty="0"/>
+          </a:p>
+          <a:p>
+            <a:pPr algn="ctr"/>
+            <a:endParaRPr lang="en-US" sz="1600" dirty="0"/>
+          </a:p>
+        </p:txBody>
+      </p:sp>
+      <p:sp>
+        <p:nvSpPr>
+          <p:cNvPr id="13" name="Text 4">
+            <a:extLst>
+              <a:ext uri="{FF2B5EF4-FFF2-40B4-BE49-F238E27FC236}">
+                <a16:creationId xmlns:a16="http://schemas.microsoft.com/office/drawing/2014/main" id="{6D707A33-D501-2BD8-953A-2D93DFDED717}"/>
+              </a:ext>
+            </a:extLst>
+          </p:cNvPr>
+          <p:cNvSpPr/>
+          <p:nvPr/>
+        </p:nvSpPr>
+        <p:spPr>
+          <a:xfrm>
+            <a:off x="4388617" y="6150894"/>
+            <a:ext cx="5225971" cy="700267"/>
+          </a:xfrm>
+          <a:prstGeom prst="rect">
+            <a:avLst/>
+          </a:prstGeom>
+          <a:noFill/>
+          <a:ln/>
+        </p:spPr>
+        <p:txBody>
+          <a:bodyPr wrap="square" lIns="0" tIns="0" rIns="0" bIns="0" rtlCol="0" anchor="ctr"/>
+          <a:lstStyle/>
+          <a:p>
+            <a:pPr algn="ctr"/>
+            <a:r>
+              <a:rPr lang="en-US" sz="1400" b="1" dirty="0">
+                <a:solidFill>
+                  <a:srgbClr val="1A1A1A"/>
+                </a:solidFill>
+                <a:ea typeface="Calibri" pitchFamily="34" charset="-122"/>
+                <a:cs typeface="Calibri" pitchFamily="34" charset="-120"/>
+              </a:rPr>
+              <a:t>Baseline: </a:t>
+            </a:r>
+            <a:r>
+              <a:rPr lang="en-US" sz="1400" dirty="0"/>
+              <a:t>baseline_evalBS1_KVCacheFalse</a:t>
+            </a:r>
+          </a:p>
+          <a:p>
+            <a:pPr algn="ctr"/>
+            <a:r>
+              <a:rPr lang="en-US" sz="1400" b="1" dirty="0"/>
+              <a:t>Optimized: </a:t>
+            </a:r>
+            <a:r>
+              <a:rPr lang="en-US" sz="1400" dirty="0"/>
+              <a:t>optimized_evalBS16_KVCacheFalse</a:t>
+            </a:r>
+          </a:p>
+          <a:p>
+            <a:pPr algn="ctr"/>
+            <a:endParaRPr lang="en-US" sz="1400" b="1" dirty="0"/>
+          </a:p>
+          <a:p>
+            <a:pPr algn="ctr"/>
+            <a:endParaRPr lang="en-US" sz="1400" dirty="0"/>
+          </a:p>
+        </p:txBody>
+      </p:sp>
       <p:pic>
         <p:nvPicPr>
-          <p:cNvPr id="17" name="Picture 16">
+          <p:cNvPr id="4" name="Picture 3">
             <a:extLst>
               <a:ext uri="{FF2B5EF4-FFF2-40B4-BE49-F238E27FC236}">
-                <a16:creationId xmlns:a16="http://schemas.microsoft.com/office/drawing/2014/main" id="{38BAB599-70D0-A6AB-522B-01094DF92FAD}"/>
+                <a16:creationId xmlns:a16="http://schemas.microsoft.com/office/drawing/2014/main" id="{7075B5DA-A68D-D6B4-C680-BBF29C34C468}"/>
               </a:ext>
             </a:extLst>
           </p:cNvPr>
@@ -14754,8 +13370,8 @@
         </p:blipFill>
         <p:spPr>
           <a:xfrm>
-            <a:off x="0" y="1529542"/>
-            <a:ext cx="7824158" cy="4667597"/>
+            <a:off x="603850" y="1350294"/>
+            <a:ext cx="6778170" cy="4258179"/>
           </a:xfrm>
           <a:prstGeom prst="rect">
             <a:avLst/>
@@ -14775,7 +13391,7 @@
 </p:sld>
 </file>
 
-<file path=ppt/slides/slide8.xml><?xml version="1.0" encoding="utf-8"?>
+<file path=ppt/slides/slide9.xml><?xml version="1.0" encoding="utf-8"?>
 <p:sld xmlns:a="http://schemas.openxmlformats.org/drawingml/2006/main" xmlns:r="http://schemas.openxmlformats.org/officeDocument/2006/relationships" xmlns:p="http://schemas.openxmlformats.org/presentationml/2006/main">
   <p:cSld name="Slide 8">
     <p:bg>
@@ -15219,255 +13835,6 @@
           <a:xfrm>
             <a:off x="2484404" y="5654216"/>
             <a:ext cx="5371683" cy="1178212"/>
-          </a:xfrm>
-          <a:prstGeom prst="rect">
-            <a:avLst/>
-          </a:prstGeom>
-        </p:spPr>
-      </p:pic>
-    </p:spTree>
-  </p:cSld>
-  <p:clrMapOvr>
-    <a:masterClrMapping/>
-  </p:clrMapOvr>
-</p:sld>
-</file>
-
-<file path=ppt/slides/slide9.xml><?xml version="1.0" encoding="utf-8"?>
-<p:sld xmlns:a="http://schemas.openxmlformats.org/drawingml/2006/main" xmlns:r="http://schemas.openxmlformats.org/officeDocument/2006/relationships" xmlns:p="http://schemas.openxmlformats.org/presentationml/2006/main">
-  <p:cSld name="Slide 9">
-    <p:bg>
-      <p:bgPr>
-        <a:solidFill>
-          <a:srgbClr val="FFFFFF"/>
-        </a:solidFill>
-        <a:effectLst/>
-      </p:bgPr>
-    </p:bg>
-    <p:spTree>
-      <p:nvGrpSpPr>
-        <p:cNvPr id="1" name=""/>
-        <p:cNvGrpSpPr/>
-        <p:nvPr/>
-      </p:nvGrpSpPr>
-      <p:grpSpPr>
-        <a:xfrm>
-          <a:off x="0" y="0"/>
-          <a:ext cx="0" cy="0"/>
-          <a:chOff x="0" y="0"/>
-          <a:chExt cx="0" cy="0"/>
-        </a:xfrm>
-      </p:grpSpPr>
-      <p:sp>
-        <p:nvSpPr>
-          <p:cNvPr id="2" name="Text 0"/>
-          <p:cNvSpPr/>
-          <p:nvPr/>
-        </p:nvSpPr>
-        <p:spPr>
-          <a:xfrm>
-            <a:off x="457200" y="502920"/>
-            <a:ext cx="11274552" cy="640080"/>
-          </a:xfrm>
-          <a:prstGeom prst="rect">
-            <a:avLst/>
-          </a:prstGeom>
-          <a:noFill/>
-          <a:ln/>
-        </p:spPr>
-        <p:txBody>
-          <a:bodyPr wrap="square" lIns="0" tIns="0" rIns="0" bIns="0" rtlCol="0" anchor="ctr"/>
-          <a:lstStyle/>
-          <a:p>
-            <a:pPr marL="0" indent="0">
-              <a:buNone/>
-            </a:pPr>
-            <a:r>
-              <a:rPr lang="en-US" sz="3200" b="1" dirty="0">
-                <a:solidFill>
-                  <a:srgbClr val="1A1A1A"/>
-                </a:solidFill>
-                <a:latin typeface="Calibri" pitchFamily="34" charset="0"/>
-                <a:ea typeface="Calibri" pitchFamily="34" charset="-122"/>
-                <a:cs typeface="Calibri" pitchFamily="34" charset="-120"/>
-              </a:rPr>
-              <a:t>Demo / Visualization</a:t>
-            </a:r>
-            <a:endParaRPr lang="en-US" sz="3200" dirty="0"/>
-          </a:p>
-        </p:txBody>
-      </p:sp>
-      <p:sp>
-        <p:nvSpPr>
-          <p:cNvPr id="3" name="Shape 1"/>
-          <p:cNvSpPr/>
-          <p:nvPr/>
-        </p:nvSpPr>
-        <p:spPr>
-          <a:xfrm>
-            <a:off x="457200" y="1188720"/>
-            <a:ext cx="11274552" cy="0"/>
-          </a:xfrm>
-          <a:prstGeom prst="line">
-            <a:avLst/>
-          </a:prstGeom>
-          <a:noFill/>
-          <a:ln w="9525">
-            <a:solidFill>
-              <a:srgbClr val="D9D9D9"/>
-            </a:solidFill>
-            <a:prstDash val="solid"/>
-          </a:ln>
-        </p:spPr>
-        <p:txBody>
-          <a:bodyPr/>
-          <a:lstStyle/>
-          <a:p>
-            <a:endParaRPr lang="en-US"/>
-          </a:p>
-        </p:txBody>
-      </p:sp>
-      <p:sp>
-        <p:nvSpPr>
-          <p:cNvPr id="4" name="Text 2"/>
-          <p:cNvSpPr/>
-          <p:nvPr/>
-        </p:nvSpPr>
-        <p:spPr>
-          <a:xfrm>
-            <a:off x="5193102" y="6126481"/>
-            <a:ext cx="902898" cy="274320"/>
-          </a:xfrm>
-          <a:prstGeom prst="rect">
-            <a:avLst/>
-          </a:prstGeom>
-          <a:noFill/>
-          <a:ln/>
-        </p:spPr>
-        <p:txBody>
-          <a:bodyPr wrap="square" lIns="0" tIns="0" rIns="0" bIns="0" rtlCol="0" anchor="ctr"/>
-          <a:lstStyle/>
-          <a:p>
-            <a:pPr marL="0" indent="0">
-              <a:buNone/>
-            </a:pPr>
-            <a:r>
-              <a:rPr lang="en-US" sz="1000" i="1" dirty="0">
-                <a:solidFill>
-                  <a:srgbClr val="6B6F76"/>
-                </a:solidFill>
-                <a:latin typeface="Calibri" pitchFamily="34" charset="0"/>
-                <a:ea typeface="Calibri" pitchFamily="34" charset="-122"/>
-                <a:cs typeface="Calibri" pitchFamily="34" charset="-120"/>
-              </a:rPr>
-              <a:t>Fallback image</a:t>
-            </a:r>
-            <a:endParaRPr lang="en-US" sz="1000" dirty="0"/>
-          </a:p>
-        </p:txBody>
-      </p:sp>
-      <p:sp>
-        <p:nvSpPr>
-          <p:cNvPr id="8" name="Text 6"/>
-          <p:cNvSpPr/>
-          <p:nvPr/>
-        </p:nvSpPr>
-        <p:spPr>
-          <a:xfrm>
-            <a:off x="457200" y="6537960"/>
-            <a:ext cx="5486400" cy="274320"/>
-          </a:xfrm>
-          <a:prstGeom prst="rect">
-            <a:avLst/>
-          </a:prstGeom>
-          <a:noFill/>
-          <a:ln/>
-        </p:spPr>
-        <p:txBody>
-          <a:bodyPr wrap="square" lIns="0" tIns="0" rIns="0" bIns="0" rtlCol="0" anchor="ctr"/>
-          <a:lstStyle/>
-          <a:p>
-            <a:pPr marL="0" indent="0">
-              <a:buNone/>
-            </a:pPr>
-            <a:r>
-              <a:rPr lang="en-US" sz="1000" i="1" dirty="0">
-                <a:solidFill>
-                  <a:srgbClr val="6B6F76"/>
-                </a:solidFill>
-                <a:latin typeface="Calibri" pitchFamily="34" charset="0"/>
-                <a:ea typeface="Calibri" pitchFamily="34" charset="-122"/>
-                <a:cs typeface="Calibri" pitchFamily="34" charset="-120"/>
-              </a:rPr>
-              <a:t>HPML · Spring 2026</a:t>
-            </a:r>
-            <a:endParaRPr lang="en-US" sz="1000" dirty="0"/>
-          </a:p>
-        </p:txBody>
-      </p:sp>
-      <p:sp>
-        <p:nvSpPr>
-          <p:cNvPr id="9" name="Text 7"/>
-          <p:cNvSpPr/>
-          <p:nvPr/>
-        </p:nvSpPr>
-        <p:spPr>
-          <a:xfrm>
-            <a:off x="6245352" y="6537960"/>
-            <a:ext cx="5486400" cy="274320"/>
-          </a:xfrm>
-          <a:prstGeom prst="rect">
-            <a:avLst/>
-          </a:prstGeom>
-          <a:noFill/>
-          <a:ln/>
-        </p:spPr>
-        <p:txBody>
-          <a:bodyPr wrap="square" lIns="0" tIns="0" rIns="0" bIns="0" rtlCol="0" anchor="ctr"/>
-          <a:lstStyle/>
-          <a:p>
-            <a:pPr marL="0" indent="0" algn="r">
-              <a:buNone/>
-            </a:pPr>
-            <a:r>
-              <a:rPr lang="en-US" sz="1000" dirty="0">
-                <a:solidFill>
-                  <a:srgbClr val="6B6F76"/>
-                </a:solidFill>
-                <a:latin typeface="Calibri" pitchFamily="34" charset="0"/>
-                <a:ea typeface="Calibri" pitchFamily="34" charset="-122"/>
-                <a:cs typeface="Calibri" pitchFamily="34" charset="-120"/>
-              </a:rPr>
-              <a:t>9 / 14</a:t>
-            </a:r>
-            <a:endParaRPr lang="en-US" sz="1000" dirty="0"/>
-          </a:p>
-        </p:txBody>
-      </p:sp>
-      <p:pic>
-        <p:nvPicPr>
-          <p:cNvPr id="11" name="Picture 10">
-            <a:extLst>
-              <a:ext uri="{FF2B5EF4-FFF2-40B4-BE49-F238E27FC236}">
-                <a16:creationId xmlns:a16="http://schemas.microsoft.com/office/drawing/2014/main" id="{D2E399AA-97FB-EA57-60BC-CF51ED36282A}"/>
-              </a:ext>
-            </a:extLst>
-          </p:cNvPr>
-          <p:cNvPicPr>
-            <a:picLocks noChangeAspect="1"/>
-          </p:cNvPicPr>
-          <p:nvPr/>
-        </p:nvPicPr>
-        <p:blipFill>
-          <a:blip r:embed="rId3"/>
-          <a:stretch>
-            <a:fillRect/>
-          </a:stretch>
-        </p:blipFill>
-        <p:spPr>
-          <a:xfrm>
-            <a:off x="759123" y="1148646"/>
-            <a:ext cx="11197087" cy="4977836"/>
           </a:xfrm>
           <a:prstGeom prst="rect">
             <a:avLst/>
